--- a/docs/deck/ari-technical.pptx
+++ b/docs/deck/ari-technical.pptx
@@ -17,6 +17,7 @@
     <p:sldId id="265" r:id="rId16"/>
     <p:sldId id="266" r:id="rId17"/>
     <p:sldId id="267" r:id="rId18"/>
+    <p:sldId id="268" r:id="rId19"/>
   </p:sldIdLst>
   <p:sldSz cx="12191695" cy="6858000" type="screen4x3"/>
   <p:notesSz cx="6858000" cy="9144000"/>
@@ -3211,7 +3212,7 @@
                 </a:solidFill>
                 <a:latin typeface="Calibri"/>
               </a:rPr>
-              <a:t>Reports are Ed25519-signed. Verification is independent of our SDK.</a:t>
+              <a:t>Reports are Ed25519-signed. Verification is independent of our SDK. Slide 2 lists statements superseded by the 2026-09-16 audit.</a:t>
             </a:r>
           </a:p>
         </p:txBody>
@@ -3268,7 +3269,710 @@
                 </a:solidFill>
                 <a:latin typeface="Calibri"/>
               </a:rPr>
-              <a:t>POWER</a:t>
+              <a:t>MEASUREMENT. HISTORICAL: WITHHELD FROM THE PAPER PENDING RERUN</a:t>
+            </a:r>
+          </a:p>
+        </p:txBody>
+      </p:sp>
+      <p:sp>
+        <p:nvSpPr>
+          <p:cNvPr id="3" name="TextBox 2"/>
+          <p:cNvSpPr txBox="1"/>
+          <p:nvPr/>
+        </p:nvSpPr>
+        <p:spPr>
+          <a:xfrm>
+            <a:off x="640080" y="640080"/>
+            <a:ext cx="10972800" cy="822960"/>
+          </a:xfrm>
+          <a:prstGeom prst="rect">
+            <a:avLst/>
+          </a:prstGeom>
+          <a:noFill/>
+        </p:spPr>
+        <p:txBody>
+          <a:bodyPr wrap="square">
+            <a:spAutoFit/>
+          </a:bodyPr>
+          <a:lstStyle/>
+          <a:p>
+            <a:pPr algn="l">
+              <a:spcAft>
+                <a:spcPts val="600"/>
+              </a:spcAft>
+            </a:pPr>
+            <a:r>
+              <a:rPr sz="2800" b="1">
+                <a:solidFill>
+                  <a:srgbClr val="1B1B1B"/>
+                </a:solidFill>
+                <a:latin typeface="Calibri"/>
+              </a:rPr>
+              <a:t>ARI-E: historical analysis of 22,000 agent runs</a:t>
+            </a:r>
+          </a:p>
+        </p:txBody>
+      </p:sp>
+      <p:graphicFrame>
+        <p:nvGraphicFramePr>
+          <p:cNvPr id="4" name="Table 3"/>
+          <p:cNvGraphicFramePr>
+            <a:graphicFrameLocks noGrp="1"/>
+          </p:cNvGraphicFramePr>
+          <p:nvPr/>
+        </p:nvGraphicFramePr>
+        <p:xfrm>
+          <a:off x="822960" y="1828800"/>
+          <a:ext cx="10515600" cy="2834640"/>
+        </p:xfrm>
+        <a:graphic>
+          <a:graphicData uri="http://schemas.openxmlformats.org/drawingml/2006/table">
+            <a:tbl>
+              <a:tblPr firstRow="1" bandRow="1">
+                <a:tableStyleId>{5C22544A-7EE6-4342-B048-85BDC9FD1C3A}</a:tableStyleId>
+              </a:tblPr>
+              <a:tblGrid>
+                <a:gridCol w="1752600"/>
+                <a:gridCol w="1752600"/>
+                <a:gridCol w="1752600"/>
+                <a:gridCol w="1752600"/>
+                <a:gridCol w="1752600"/>
+                <a:gridCol w="1752600"/>
+              </a:tblGrid>
+              <a:tr h="566928">
+                <a:tc>
+                  <a:txBody>
+                    <a:bodyPr/>
+                    <a:lstStyle/>
+                    <a:p>
+                      <a:pPr algn="l"/>
+                      <a:r>
+                        <a:rPr sz="1200" b="1">
+                          <a:latin typeface="Calibri"/>
+                        </a:rPr>
+                        <a:t>Contrast</a:t>
+                      </a:r>
+                    </a:p>
+                  </a:txBody>
+                  <a:tcPr/>
+                </a:tc>
+                <a:tc>
+                  <a:txBody>
+                    <a:bodyPr/>
+                    <a:lstStyle/>
+                    <a:p>
+                      <a:pPr algn="r"/>
+                      <a:r>
+                        <a:rPr sz="1200" b="1">
+                          <a:latin typeface="Calibri"/>
+                        </a:rPr>
+                        <a:t>Cases</a:t>
+                      </a:r>
+                    </a:p>
+                  </a:txBody>
+                  <a:tcPr/>
+                </a:tc>
+                <a:tc>
+                  <a:txBody>
+                    <a:bodyPr/>
+                    <a:lstStyle/>
+                    <a:p>
+                      <a:pPr algn="r"/>
+                      <a:r>
+                        <a:rPr sz="1200" b="1">
+                          <a:latin typeface="Calibri"/>
+                        </a:rPr>
+                        <a:t>Self</a:t>
+                      </a:r>
+                    </a:p>
+                  </a:txBody>
+                  <a:tcPr/>
+                </a:tc>
+                <a:tc>
+                  <a:txBody>
+                    <a:bodyPr/>
+                    <a:lstStyle/>
+                    <a:p>
+                      <a:pPr algn="r"/>
+                      <a:r>
+                        <a:rPr sz="1200" b="1">
+                          <a:latin typeface="Calibri"/>
+                        </a:rPr>
+                        <a:t>Cross</a:t>
+                      </a:r>
+                    </a:p>
+                  </a:txBody>
+                  <a:tcPr/>
+                </a:tc>
+                <a:tc>
+                  <a:txBody>
+                    <a:bodyPr/>
+                    <a:lstStyle/>
+                    <a:p>
+                      <a:pPr algn="r"/>
+                      <a:r>
+                        <a:rPr sz="1200" b="1">
+                          <a:latin typeface="Calibri"/>
+                        </a:rPr>
+                        <a:t>Effect</a:t>
+                      </a:r>
+                    </a:p>
+                  </a:txBody>
+                  <a:tcPr/>
+                </a:tc>
+                <a:tc>
+                  <a:txBody>
+                    <a:bodyPr/>
+                    <a:lstStyle/>
+                    <a:p>
+                      <a:pPr algn="r"/>
+                      <a:r>
+                        <a:rPr sz="1200" b="1">
+                          <a:latin typeface="Calibri"/>
+                        </a:rPr>
+                        <a:t>95% CI</a:t>
+                      </a:r>
+                    </a:p>
+                  </a:txBody>
+                  <a:tcPr/>
+                </a:tc>
+              </a:tr>
+              <a:tr h="566928">
+                <a:tc>
+                  <a:txBody>
+                    <a:bodyPr/>
+                    <a:lstStyle/>
+                    <a:p>
+                      <a:pPr algn="l"/>
+                      <a:r>
+                        <a:rPr sz="1200" b="0">
+                          <a:latin typeface="Calibri"/>
+                        </a:rPr>
+                        <a:t>scaffold model=qwen35_122b</a:t>
+                      </a:r>
+                    </a:p>
+                  </a:txBody>
+                  <a:tcPr/>
+                </a:tc>
+                <a:tc>
+                  <a:txBody>
+                    <a:bodyPr/>
+                    <a:lstStyle/>
+                    <a:p>
+                      <a:pPr algn="r"/>
+                      <a:r>
+                        <a:rPr sz="1200" b="0">
+                          <a:latin typeface="Calibri"/>
+                        </a:rPr>
+                        <a:t>10,788</a:t>
+                      </a:r>
+                    </a:p>
+                  </a:txBody>
+                  <a:tcPr/>
+                </a:tc>
+                <a:tc>
+                  <a:txBody>
+                    <a:bodyPr/>
+                    <a:lstStyle/>
+                    <a:p>
+                      <a:pPr algn="r"/>
+                      <a:r>
+                        <a:rPr sz="1200" b="0">
+                          <a:latin typeface="Calibri"/>
+                        </a:rPr>
+                        <a:t>0.874</a:t>
+                      </a:r>
+                    </a:p>
+                  </a:txBody>
+                  <a:tcPr/>
+                </a:tc>
+                <a:tc>
+                  <a:txBody>
+                    <a:bodyPr/>
+                    <a:lstStyle/>
+                    <a:p>
+                      <a:pPr algn="r"/>
+                      <a:r>
+                        <a:rPr sz="1200" b="0">
+                          <a:latin typeface="Calibri"/>
+                        </a:rPr>
+                        <a:t>0.785</a:t>
+                      </a:r>
+                    </a:p>
+                  </a:txBody>
+                  <a:tcPr/>
+                </a:tc>
+                <a:tc>
+                  <a:txBody>
+                    <a:bodyPr/>
+                    <a:lstStyle/>
+                    <a:p>
+                      <a:pPr algn="r"/>
+                      <a:r>
+                        <a:rPr sz="1200" b="0">
+                          <a:latin typeface="Calibri"/>
+                        </a:rPr>
+                        <a:t>+0.089</a:t>
+                      </a:r>
+                    </a:p>
+                  </a:txBody>
+                  <a:tcPr/>
+                </a:tc>
+                <a:tc>
+                  <a:txBody>
+                    <a:bodyPr/>
+                    <a:lstStyle/>
+                    <a:p>
+                      <a:pPr algn="r"/>
+                      <a:r>
+                        <a:rPr sz="1200" b="0">
+                          <a:latin typeface="Calibri"/>
+                        </a:rPr>
+                        <a:t>[+0.083, +0.094]</a:t>
+                      </a:r>
+                    </a:p>
+                  </a:txBody>
+                  <a:tcPr/>
+                </a:tc>
+              </a:tr>
+              <a:tr h="566928">
+                <a:tc>
+                  <a:txBody>
+                    <a:bodyPr/>
+                    <a:lstStyle/>
+                    <a:p>
+                      <a:pPr algn="l"/>
+                      <a:r>
+                        <a:rPr sz="1200" b="0">
+                          <a:latin typeface="Calibri"/>
+                        </a:rPr>
+                        <a:t>scaffold model=minimax_m25</a:t>
+                      </a:r>
+                    </a:p>
+                  </a:txBody>
+                  <a:tcPr/>
+                </a:tc>
+                <a:tc>
+                  <a:txBody>
+                    <a:bodyPr/>
+                    <a:lstStyle/>
+                    <a:p>
+                      <a:pPr algn="r"/>
+                      <a:r>
+                        <a:rPr sz="1200" b="0">
+                          <a:latin typeface="Calibri"/>
+                        </a:rPr>
+                        <a:t>12,195</a:t>
+                      </a:r>
+                    </a:p>
+                  </a:txBody>
+                  <a:tcPr/>
+                </a:tc>
+                <a:tc>
+                  <a:txBody>
+                    <a:bodyPr/>
+                    <a:lstStyle/>
+                    <a:p>
+                      <a:pPr algn="r"/>
+                      <a:r>
+                        <a:rPr sz="1200" b="0">
+                          <a:latin typeface="Calibri"/>
+                        </a:rPr>
+                        <a:t>0.899</a:t>
+                      </a:r>
+                    </a:p>
+                  </a:txBody>
+                  <a:tcPr/>
+                </a:tc>
+                <a:tc>
+                  <a:txBody>
+                    <a:bodyPr/>
+                    <a:lstStyle/>
+                    <a:p>
+                      <a:pPr algn="r"/>
+                      <a:r>
+                        <a:rPr sz="1200" b="0">
+                          <a:latin typeface="Calibri"/>
+                        </a:rPr>
+                        <a:t>0.849</a:t>
+                      </a:r>
+                    </a:p>
+                  </a:txBody>
+                  <a:tcPr/>
+                </a:tc>
+                <a:tc>
+                  <a:txBody>
+                    <a:bodyPr/>
+                    <a:lstStyle/>
+                    <a:p>
+                      <a:pPr algn="r"/>
+                      <a:r>
+                        <a:rPr sz="1200" b="0">
+                          <a:latin typeface="Calibri"/>
+                        </a:rPr>
+                        <a:t>+0.050</a:t>
+                      </a:r>
+                    </a:p>
+                  </a:txBody>
+                  <a:tcPr/>
+                </a:tc>
+                <a:tc>
+                  <a:txBody>
+                    <a:bodyPr/>
+                    <a:lstStyle/>
+                    <a:p>
+                      <a:pPr algn="r"/>
+                      <a:r>
+                        <a:rPr sz="1200" b="0">
+                          <a:latin typeface="Calibri"/>
+                        </a:rPr>
+                        <a:t>[+0.044, +0.052]</a:t>
+                      </a:r>
+                    </a:p>
+                  </a:txBody>
+                  <a:tcPr/>
+                </a:tc>
+              </a:tr>
+              <a:tr h="566928">
+                <a:tc>
+                  <a:txBody>
+                    <a:bodyPr/>
+                    <a:lstStyle/>
+                    <a:p>
+                      <a:pPr algn="l"/>
+                      <a:r>
+                        <a:rPr sz="1200" b="0">
+                          <a:latin typeface="Calibri"/>
+                        </a:rPr>
+                        <a:t>model, scaffold=sweagent</a:t>
+                      </a:r>
+                    </a:p>
+                  </a:txBody>
+                  <a:tcPr/>
+                </a:tc>
+                <a:tc>
+                  <a:txBody>
+                    <a:bodyPr/>
+                    <a:lstStyle/>
+                    <a:p>
+                      <a:pPr algn="r"/>
+                      <a:r>
+                        <a:rPr sz="1200" b="0">
+                          <a:latin typeface="Calibri"/>
+                        </a:rPr>
+                        <a:t>10,674</a:t>
+                      </a:r>
+                    </a:p>
+                  </a:txBody>
+                  <a:tcPr/>
+                </a:tc>
+                <a:tc>
+                  <a:txBody>
+                    <a:bodyPr/>
+                    <a:lstStyle/>
+                    <a:p>
+                      <a:pPr algn="r"/>
+                      <a:r>
+                        <a:rPr sz="1200" b="0">
+                          <a:latin typeface="Calibri"/>
+                        </a:rPr>
+                        <a:t>0.880</a:t>
+                      </a:r>
+                    </a:p>
+                  </a:txBody>
+                  <a:tcPr/>
+                </a:tc>
+                <a:tc>
+                  <a:txBody>
+                    <a:bodyPr/>
+                    <a:lstStyle/>
+                    <a:p>
+                      <a:pPr algn="r"/>
+                      <a:r>
+                        <a:rPr sz="1200" b="0">
+                          <a:latin typeface="Calibri"/>
+                        </a:rPr>
+                        <a:t>0.839</a:t>
+                      </a:r>
+                    </a:p>
+                  </a:txBody>
+                  <a:tcPr/>
+                </a:tc>
+                <a:tc>
+                  <a:txBody>
+                    <a:bodyPr/>
+                    <a:lstStyle/>
+                    <a:p>
+                      <a:pPr algn="r"/>
+                      <a:r>
+                        <a:rPr sz="1200" b="0">
+                          <a:latin typeface="Calibri"/>
+                        </a:rPr>
+                        <a:t>+0.041</a:t>
+                      </a:r>
+                    </a:p>
+                  </a:txBody>
+                  <a:tcPr/>
+                </a:tc>
+                <a:tc>
+                  <a:txBody>
+                    <a:bodyPr/>
+                    <a:lstStyle/>
+                    <a:p>
+                      <a:pPr algn="r"/>
+                      <a:r>
+                        <a:rPr sz="1200" b="0">
+                          <a:latin typeface="Calibri"/>
+                        </a:rPr>
+                        <a:t>[+0.039, +0.046]</a:t>
+                      </a:r>
+                    </a:p>
+                  </a:txBody>
+                  <a:tcPr/>
+                </a:tc>
+              </a:tr>
+              <a:tr h="566928">
+                <a:tc>
+                  <a:txBody>
+                    <a:bodyPr/>
+                    <a:lstStyle/>
+                    <a:p>
+                      <a:pPr algn="l"/>
+                      <a:r>
+                        <a:rPr sz="1200" b="0">
+                          <a:latin typeface="Calibri"/>
+                        </a:rPr>
+                        <a:t>model, scaffold=openhands</a:t>
+                      </a:r>
+                    </a:p>
+                  </a:txBody>
+                  <a:tcPr/>
+                </a:tc>
+                <a:tc>
+                  <a:txBody>
+                    <a:bodyPr/>
+                    <a:lstStyle/>
+                    <a:p>
+                      <a:pPr algn="r"/>
+                      <a:r>
+                        <a:rPr sz="1200" b="0">
+                          <a:latin typeface="Calibri"/>
+                        </a:rPr>
+                        <a:t>11,933</a:t>
+                      </a:r>
+                    </a:p>
+                  </a:txBody>
+                  <a:tcPr/>
+                </a:tc>
+                <a:tc>
+                  <a:txBody>
+                    <a:bodyPr/>
+                    <a:lstStyle/>
+                    <a:p>
+                      <a:pPr algn="r"/>
+                      <a:r>
+                        <a:rPr sz="1200" b="0">
+                          <a:latin typeface="Calibri"/>
+                        </a:rPr>
+                        <a:t>0.892</a:t>
+                      </a:r>
+                    </a:p>
+                  </a:txBody>
+                  <a:tcPr/>
+                </a:tc>
+                <a:tc>
+                  <a:txBody>
+                    <a:bodyPr/>
+                    <a:lstStyle/>
+                    <a:p>
+                      <a:pPr algn="r"/>
+                      <a:r>
+                        <a:rPr sz="1200" b="0">
+                          <a:latin typeface="Calibri"/>
+                        </a:rPr>
+                        <a:t>0.833</a:t>
+                      </a:r>
+                    </a:p>
+                  </a:txBody>
+                  <a:tcPr/>
+                </a:tc>
+                <a:tc>
+                  <a:txBody>
+                    <a:bodyPr/>
+                    <a:lstStyle/>
+                    <a:p>
+                      <a:pPr algn="r"/>
+                      <a:r>
+                        <a:rPr sz="1200" b="0">
+                          <a:latin typeface="Calibri"/>
+                        </a:rPr>
+                        <a:t>+0.059</a:t>
+                      </a:r>
+                    </a:p>
+                  </a:txBody>
+                  <a:tcPr/>
+                </a:tc>
+                <a:tc>
+                  <a:txBody>
+                    <a:bodyPr/>
+                    <a:lstStyle/>
+                    <a:p>
+                      <a:pPr algn="r"/>
+                      <a:r>
+                        <a:rPr sz="1200" b="0">
+                          <a:latin typeface="Calibri"/>
+                        </a:rPr>
+                        <a:t>[+0.054, +0.062]</a:t>
+                      </a:r>
+                    </a:p>
+                  </a:txBody>
+                  <a:tcPr/>
+                </a:tc>
+              </a:tr>
+            </a:tbl>
+          </a:graphicData>
+        </a:graphic>
+      </p:graphicFrame>
+      <p:sp>
+        <p:nvSpPr>
+          <p:cNvPr id="5" name="TextBox 4"/>
+          <p:cNvSpPr txBox="1"/>
+          <p:nvPr/>
+        </p:nvSpPr>
+        <p:spPr>
+          <a:xfrm>
+            <a:off x="822960" y="4480560"/>
+            <a:ext cx="10607040" cy="4206240"/>
+          </a:xfrm>
+          <a:prstGeom prst="rect">
+            <a:avLst/>
+          </a:prstGeom>
+          <a:noFill/>
+        </p:spPr>
+        <p:txBody>
+          <a:bodyPr wrap="square">
+            <a:spAutoFit/>
+          </a:bodyPr>
+          <a:lstStyle/>
+          <a:p>
+            <a:pPr>
+              <a:spcAft>
+                <a:spcPts val="1200"/>
+              </a:spcAft>
+            </a:pPr>
+            <a:r>
+              <a:rPr sz="1300" b="0">
+                <a:solidFill>
+                  <a:srgbClr val="1B1B1B"/>
+                </a:solidFill>
+                <a:latin typeface="Calibri"/>
+              </a:rPr>
+              <a:t>Source: nvidia/Open-SWE-Traces. SWE-agent and OpenHands, crossed with two models. Neither scaffold was built by us.</a:t>
+            </a:r>
+          </a:p>
+          <a:p>
+            <a:pPr>
+              <a:spcAft>
+                <a:spcPts val="1200"/>
+              </a:spcAft>
+            </a:pPr>
+            <a:r>
+              <a:rPr sz="1300" b="0">
+                <a:solidFill>
+                  <a:srgbClr val="1B1B1B"/>
+                </a:solidFill>
+                <a:latin typeface="Calibri"/>
+              </a:rPr>
+              <a:t>Outcome is the repository's own test suite, which the agent never saw.</a:t>
+            </a:r>
+          </a:p>
+          <a:p>
+            <a:pPr>
+              <a:spcAft>
+                <a:spcPts val="1200"/>
+              </a:spcAft>
+            </a:pPr>
+            <a:r>
+              <a:rPr sz="1300" b="1">
+                <a:solidFill>
+                  <a:srgbClr val="C1543A"/>
+                </a:solidFill>
+                <a:latin typeface="Calibri"/>
+              </a:rPr>
+              <a:t>Largest threat: 22% of rows were ungraded and dropped. If grading failure tracks difficulty, the surviving set is easier.</a:t>
+            </a:r>
+          </a:p>
+          <a:p>
+            <a:pPr>
+              <a:spcAft>
+                <a:spcPts val="1200"/>
+              </a:spcAft>
+            </a:pPr>
+            <a:r>
+              <a:rPr sz="1300" b="1">
+                <a:solidFill>
+                  <a:srgbClr val="C1543A"/>
+                </a:solidFill>
+                <a:latin typeface="Calibri"/>
+              </a:rPr>
+              <a:t>Superseded: earlier estimator and partial export. Rerun against a pinned dataset revision before quoting.</a:t>
+            </a:r>
+          </a:p>
+        </p:txBody>
+      </p:sp>
+    </p:spTree>
+  </p:cSld>
+  <p:clrMapOvr>
+    <a:masterClrMapping/>
+  </p:clrMapOvr>
+</p:sld>
+</file>
+
+<file path=ppt/slides/slide11.xml><?xml version="1.0" encoding="utf-8"?>
+<p:sld xmlns:a="http://schemas.openxmlformats.org/drawingml/2006/main" xmlns:p="http://schemas.openxmlformats.org/presentationml/2006/main" xmlns:r="http://schemas.openxmlformats.org/officeDocument/2006/relationships">
+  <p:cSld>
+    <p:spTree>
+      <p:nvGrpSpPr>
+        <p:cNvPr id="1" name=""/>
+        <p:cNvGrpSpPr/>
+        <p:nvPr/>
+      </p:nvGrpSpPr>
+      <p:grpSpPr/>
+      <p:sp>
+        <p:nvSpPr>
+          <p:cNvPr id="2" name="TextBox 1"/>
+          <p:cNvSpPr txBox="1"/>
+          <p:nvPr/>
+        </p:nvSpPr>
+        <p:spPr>
+          <a:xfrm>
+            <a:off x="640080" y="320040"/>
+            <a:ext cx="10972800" cy="320040"/>
+          </a:xfrm>
+          <a:prstGeom prst="rect">
+            <a:avLst/>
+          </a:prstGeom>
+          <a:noFill/>
+        </p:spPr>
+        <p:txBody>
+          <a:bodyPr wrap="square">
+            <a:spAutoFit/>
+          </a:bodyPr>
+          <a:lstStyle/>
+          <a:p>
+            <a:pPr algn="l">
+              <a:spcAft>
+                <a:spcPts val="600"/>
+              </a:spcAft>
+            </a:pPr>
+            <a:r>
+              <a:rPr sz="1200" b="0">
+                <a:solidFill>
+                  <a:srgbClr val="6E6E6E"/>
+                </a:solidFill>
+                <a:latin typeface="Calibri"/>
+              </a:rPr>
+              <a:t>POWER. HISTORICAL: SIMULATION PREDATES THE ESTIMATOR CORRECTION</a:t>
             </a:r>
           </a:p>
         </p:txBody>
@@ -3845,7 +4549,7 @@
 </p:sld>
 </file>
 
-<file path=ppt/slides/slide11.xml><?xml version="1.0" encoding="utf-8"?>
+<file path=ppt/slides/slide12.xml><?xml version="1.0" encoding="utf-8"?>
 <p:sld xmlns:a="http://schemas.openxmlformats.org/drawingml/2006/main" xmlns:p="http://schemas.openxmlformats.org/presentationml/2006/main" xmlns:r="http://schemas.openxmlformats.org/officeDocument/2006/relationships">
   <p:cSld>
     <p:spTree>
@@ -4044,7 +4748,7 @@
 </p:sld>
 </file>
 
-<file path=ppt/slides/slide12.xml><?xml version="1.0" encoding="utf-8"?>
+<file path=ppt/slides/slide13.xml><?xml version="1.0" encoding="utf-8"?>
 <p:sld xmlns:a="http://schemas.openxmlformats.org/drawingml/2006/main" xmlns:p="http://schemas.openxmlformats.org/presentationml/2006/main" xmlns:r="http://schemas.openxmlformats.org/officeDocument/2006/relationships">
   <p:cSld>
     <p:spTree>
@@ -4141,8 +4845,8 @@
           <p:nvPr/>
         </p:nvGraphicFramePr>
         <p:xfrm>
-          <a:off x="822960" y="1828800"/>
-          <a:ext cx="10515600" cy="3291840"/>
+          <a:off x="822960" y="1737360"/>
+          <a:ext cx="10515600" cy="3840480"/>
         </p:xfrm>
         <a:graphic>
           <a:graphicData uri="http://schemas.openxmlformats.org/drawingml/2006/table">
@@ -4154,7 +4858,7 @@
                 <a:gridCol w="5257800"/>
                 <a:gridCol w="5257800"/>
               </a:tblGrid>
-              <a:tr h="548640">
+              <a:tr h="384048">
                 <a:tc>
                   <a:txBody>
                     <a:bodyPr/>
@@ -4162,7 +4866,7 @@
                     <a:p>
                       <a:pPr algn="l"/>
                       <a:r>
-                        <a:rPr sz="1400" b="1">
+                        <a:rPr sz="1200" b="1">
                           <a:latin typeface="Calibri"/>
                         </a:rPr>
                         <a:t>Claim</a:t>
@@ -4178,7 +4882,7 @@
                     <a:p>
                       <a:pPr algn="r"/>
                       <a:r>
-                        <a:rPr sz="1400" b="1">
+                        <a:rPr sz="1200" b="1">
                           <a:latin typeface="Calibri"/>
                         </a:rPr>
                         <a:t>Status</a:t>
@@ -4188,7 +4892,7 @@
                   <a:tcPr/>
                 </a:tc>
               </a:tr>
-              <a:tr h="548640">
+              <a:tr h="384048">
                 <a:tc>
                   <a:txBody>
                     <a:bodyPr/>
@@ -4196,7 +4900,7 @@
                     <a:p>
                       <a:pPr algn="l"/>
                       <a:r>
-                        <a:rPr sz="1400" b="0">
+                        <a:rPr sz="1200" b="0">
                           <a:latin typeface="Calibri"/>
                         </a:rPr>
                         <a:t>'SEMQ is ~300x more sensitive than retrieval'</a:t>
@@ -4212,7 +4916,7 @@
                     <a:p>
                       <a:pPr algn="r"/>
                       <a:r>
-                        <a:rPr sz="1400" b="0">
+                        <a:rPr sz="1200" b="0">
                           <a:latin typeface="Calibri"/>
                         </a:rPr>
                         <a:t>Retracted</a:t>
@@ -4222,7 +4926,7 @@
                   <a:tcPr/>
                 </a:tc>
               </a:tr>
-              <a:tr h="548640">
+              <a:tr h="384048">
                 <a:tc>
                   <a:txBody>
                     <a:bodyPr/>
@@ -4230,7 +4934,7 @@
                     <a:p>
                       <a:pPr algn="l"/>
                       <a:r>
-                        <a:rPr sz="1400" b="0">
+                        <a:rPr sz="1200" b="0">
                           <a:latin typeface="Calibri"/>
                         </a:rPr>
                         <a:t>'SEMQ is necessary for the index' (v1, seed stability)</a:t>
@@ -4246,7 +4950,7 @@
                     <a:p>
                       <a:pPr algn="r"/>
                       <a:r>
-                        <a:rPr sz="1400" b="0">
+                        <a:rPr sz="1200" b="0">
                           <a:latin typeface="Calibri"/>
                         </a:rPr>
                         <a:t>Retracted</a:t>
@@ -4256,7 +4960,7 @@
                   <a:tcPr/>
                 </a:tc>
               </a:tr>
-              <a:tr h="548640">
+              <a:tr h="384048">
                 <a:tc>
                   <a:txBody>
                     <a:bodyPr/>
@@ -4264,7 +4968,7 @@
                     <a:p>
                       <a:pPr algn="l"/>
                       <a:r>
-                        <a:rPr sz="1400" b="0">
+                        <a:rPr sz="1200" b="0">
                           <a:latin typeface="Calibri"/>
                         </a:rPr>
                         <a:t>'A frozen VQ is not verifiable' (v2)</a:t>
@@ -4280,7 +4984,7 @@
                     <a:p>
                       <a:pPr algn="r"/>
                       <a:r>
-                        <a:rPr sz="1400" b="0">
+                        <a:rPr sz="1200" b="0">
                           <a:latin typeface="Calibri"/>
                         </a:rPr>
                         <a:t>Retracted</a:t>
@@ -4290,7 +4994,7 @@
                   <a:tcPr/>
                 </a:tc>
               </a:tr>
-              <a:tr h="548640">
+              <a:tr h="384048">
                 <a:tc>
                   <a:txBody>
                     <a:bodyPr/>
@@ -4298,7 +5002,7 @@
                     <a:p>
                       <a:pPr algn="l"/>
                       <a:r>
-                        <a:rPr sz="1400" b="0">
+                        <a:rPr sz="1200" b="0">
                           <a:latin typeface="Calibri"/>
                         </a:rPr>
                         <a:t>'Serving changes are invisible to retrieval'</a:t>
@@ -4314,7 +5018,7 @@
                     <a:p>
                       <a:pPr algn="r"/>
                       <a:r>
-                        <a:rPr sz="1400" b="0">
+                        <a:rPr sz="1200" b="0">
                           <a:latin typeface="Calibri"/>
                         </a:rPr>
                         <a:t>Narrowed to quality metrics</a:t>
@@ -4324,7 +5028,7 @@
                   <a:tcPr/>
                 </a:tc>
               </a:tr>
-              <a:tr h="548640">
+              <a:tr h="384048">
                 <a:tc>
                   <a:txBody>
                     <a:bodyPr/>
@@ -4332,7 +5036,7 @@
                     <a:p>
                       <a:pPr algn="l"/>
                       <a:r>
-                        <a:rPr sz="1400" b="0">
+                        <a:rPr sz="1200" b="0">
                           <a:latin typeface="Calibri"/>
                         </a:rPr>
                         <a:t>'SEMQ is the most sensitive decoding probe'</a:t>
@@ -4348,10 +5052,146 @@
                     <a:p>
                       <a:pPr algn="r"/>
                       <a:r>
-                        <a:rPr sz="1400" b="0">
+                        <a:rPr sz="1200" b="0">
                           <a:latin typeface="Calibri"/>
                         </a:rPr>
                         <a:t>Withdrawn; margin is cheaper</a:t>
+                      </a:r>
+                    </a:p>
+                  </a:txBody>
+                  <a:tcPr/>
+                </a:tc>
+              </a:tr>
+              <a:tr h="384048">
+                <a:tc>
+                  <a:txBody>
+                    <a:bodyPr/>
+                    <a:lstStyle/>
+                    <a:p>
+                      <a:pPr algn="l"/>
+                      <a:r>
+                        <a:rPr sz="1200" b="0">
+                          <a:latin typeface="Calibri"/>
+                        </a:rPr>
+                        <a:t>'Self-hosted time cells satisfy the &gt;24 h gap'</a:t>
+                      </a:r>
+                    </a:p>
+                  </a:txBody>
+                  <a:tcPr/>
+                </a:tc>
+                <a:tc>
+                  <a:txBody>
+                    <a:bodyPr/>
+                    <a:lstStyle/>
+                    <a:p>
+                      <a:pPr algn="r"/>
+                      <a:r>
+                        <a:rPr sz="1200" b="0">
+                          <a:latin typeface="Calibri"/>
+                        </a:rPr>
+                        <a:t>Superseded; immediate repeats</a:t>
+                      </a:r>
+                    </a:p>
+                  </a:txBody>
+                  <a:tcPr/>
+                </a:tc>
+              </a:tr>
+              <a:tr h="384048">
+                <a:tc>
+                  <a:txBody>
+                    <a:bodyPr/>
+                    <a:lstStyle/>
+                    <a:p>
+                      <a:pPr algn="l"/>
+                      <a:r>
+                        <a:rPr sz="1200" b="0">
+                          <a:latin typeface="Calibri"/>
+                        </a:rPr>
+                        <a:t>'Two-encoder run shows clean batch invariance'</a:t>
+                      </a:r>
+                    </a:p>
+                  </a:txBody>
+                  <a:tcPr/>
+                </a:tc>
+                <a:tc>
+                  <a:txBody>
+                    <a:bodyPr/>
+                    <a:lstStyle/>
+                    <a:p>
+                      <a:pPr algn="r"/>
+                      <a:r>
+                        <a:rPr sz="1200" b="0">
+                          <a:latin typeface="Calibri"/>
+                        </a:rPr>
+                        <a:t>Superseded by seven-encoder table</a:t>
+                      </a:r>
+                    </a:p>
+                  </a:txBody>
+                  <a:tcPr/>
+                </a:tc>
+              </a:tr>
+              <a:tr h="384048">
+                <a:tc>
+                  <a:txBody>
+                    <a:bodyPr/>
+                    <a:lstStyle/>
+                    <a:p>
+                      <a:pPr algn="l"/>
+                      <a:r>
+                        <a:rPr sz="1200" b="0">
+                          <a:latin typeface="Calibri"/>
+                        </a:rPr>
+                        <a:t>'Decoding H-bar is a bit or coordinate rate'</a:t>
+                      </a:r>
+                    </a:p>
+                  </a:txBody>
+                  <a:tcPr/>
+                </a:tc>
+                <a:tc>
+                  <a:txBody>
+                    <a:bodyPr/>
+                    <a:lstStyle/>
+                    <a:p>
+                      <a:pPr algn="r"/>
+                      <a:r>
+                        <a:rPr sz="1200" b="0">
+                          <a:latin typeface="Calibri"/>
+                        </a:rPr>
+                        <a:t>Corrected; packed-byte rate</a:t>
+                      </a:r>
+                    </a:p>
+                  </a:txBody>
+                  <a:tcPr/>
+                </a:tc>
+              </a:tr>
+              <a:tr h="384048">
+                <a:tc>
+                  <a:txBody>
+                    <a:bodyPr/>
+                    <a:lstStyle/>
+                    <a:p>
+                      <a:pPr algn="l"/>
+                      <a:r>
+                        <a:rPr sz="1200" b="0">
+                          <a:latin typeface="Calibri"/>
+                        </a:rPr>
+                        <a:t>ARI-E contrasts and power</a:t>
+                      </a:r>
+                    </a:p>
+                  </a:txBody>
+                  <a:tcPr/>
+                </a:tc>
+                <a:tc>
+                  <a:txBody>
+                    <a:bodyPr/>
+                    <a:lstStyle/>
+                    <a:p>
+                      <a:pPr algn="r"/>
+                      <a:r>
+                        <a:rPr sz="1200" b="0">
+                          <a:latin typeface="Calibri"/>
+                        </a:rPr>
+                        <a:t>Withheld pending rerun</a:t>
                       </a:r>
                     </a:p>
                   </a:txBody>
@@ -4370,7 +5210,7 @@
         </p:nvSpPr>
         <p:spPr>
           <a:xfrm>
-            <a:off x="822960" y="5029200"/>
+            <a:off x="822960" y="5669280"/>
             <a:ext cx="10607040" cy="4206240"/>
           </a:xfrm>
           <a:prstGeom prst="rect">
@@ -4390,13 +5230,13 @@
               </a:spcAft>
             </a:pPr>
             <a:r>
-              <a:rPr sz="1600" b="1">
+              <a:rPr sz="1400" b="1">
                 <a:solidFill>
                   <a:srgbClr val="0B6E4F"/>
                 </a:solidFill>
                 <a:latin typeface="Calibri"/>
               </a:rPr>
-              <a:t>Each was retracted because we tested it adversarially and it failed, not because someone else caught it.</a:t>
+              <a:t>Most were retracted because we tested them adversarially; the last four came from the 2026-09-16 repository audit.</a:t>
             </a:r>
           </a:p>
           <a:p>
@@ -4406,13 +5246,13 @@
               </a:spcAft>
             </a:pPr>
             <a:r>
-              <a:rPr sz="1600" b="0">
+              <a:rPr sz="1400" b="0">
                 <a:solidFill>
                   <a:srgbClr val="1B1B1B"/>
                 </a:solidFill>
                 <a:latin typeface="Calibri"/>
               </a:rPr>
-              <a:t>The claims that remain have survived that process.</a:t>
+              <a:t>Remaining claims are listed with their evidence in docs/paper/CLAIM_TO_EVIDENCE.md.</a:t>
             </a:r>
           </a:p>
         </p:txBody>
@@ -4469,7 +5309,7 @@
                 </a:solidFill>
                 <a:latin typeface="Calibri"/>
               </a:rPr>
-              <a:t>INSTRUMENT</a:t>
+              <a:t>READ FIRST: 2026-09-16 REPOSITORY AUDIT</a:t>
             </a:r>
           </a:p>
         </p:txBody>
@@ -4508,7 +5348,7 @@
                 </a:solidFill>
                 <a:latin typeface="Calibri"/>
               </a:rPr>
-              <a:t>What SEMQ is, and what it is for</a:t>
+              <a:t>Superseded statements</a:t>
             </a:r>
           </a:p>
         </p:txBody>
@@ -4541,13 +5381,13 @@
               </a:spcAft>
             </a:pPr>
             <a:r>
-              <a:rPr sz="1700" b="1">
+              <a:rPr sz="1400" b="1">
                 <a:solidFill>
                   <a:srgbClr val="1B1B1B"/>
                 </a:solidFill>
                 <a:latin typeface="Calibri"/>
               </a:rPr>
-              <a:t>SEMQ maps a float vector to a symbolic code by comparing against a calibrated scale.</a:t>
+              <a:t>This deck is a historical presentation artifact, regenerated from the experiment JSON on 2026-09-16. It is not maintained scientific evidence. Use the paper and docs/REPOSITORY_AUDIT.md for current claims.</a:t>
             </a:r>
           </a:p>
           <a:p>
@@ -4557,13 +5397,45 @@
               </a:spcAft>
             </a:pPr>
             <a:r>
-              <a:rPr sz="1700" b="0">
+              <a:rPr sz="1400" b="0">
+                <a:solidFill>
+                  <a:srgbClr val="C1543A"/>
+                </a:solidFill>
+                <a:latin typeface="Calibri"/>
+              </a:rPr>
+              <a:t>ARI-E slides: the harness-effect numbers come from an earlier estimator and a partial trajectory export. The paper withholds them pending a rerun.</a:t>
+            </a:r>
+          </a:p>
+          <a:p>
+            <a:pPr>
+              <a:spcAft>
+                <a:spcPts val="1200"/>
+              </a:spcAft>
+            </a:pPr>
+            <a:r>
+              <a:rPr sz="1400" b="0">
+                <a:solidFill>
+                  <a:srgbClr val="C1543A"/>
+                </a:solidFill>
+                <a:latin typeface="Calibri"/>
+              </a:rPr>
+              <a:t>Self-hosted `time` cells were immediate repeats, not captures after a gap greater than 24 hours. The self-hosted comparable core is incomplete.</a:t>
+            </a:r>
+          </a:p>
+          <a:p>
+            <a:pPr>
+              <a:spcAft>
+                <a:spcPts val="1200"/>
+              </a:spcAft>
+            </a:pPr>
+            <a:r>
+              <a:rPr sz="1400" b="0">
                 <a:solidFill>
                   <a:srgbClr val="1B1B1B"/>
                 </a:solidFill>
                 <a:latin typeface="Calibri"/>
               </a:rPr>
-              <a:t>Codes are exact, so agreement is a hash comparison rather than a threshold.</a:t>
+              <a:t>A nonsignificant Recall@10 difference is not equivalence. Ranked result lists did change under the same conditions.</a:t>
             </a:r>
           </a:p>
           <a:p>
@@ -4573,13 +5445,13 @@
               </a:spcAft>
             </a:pPr>
             <a:r>
-              <a:rPr sz="1700" b="0">
+              <a:rPr sz="1400" b="0">
                 <a:solidFill>
                   <a:srgbClr val="1B1B1B"/>
                 </a:solidFill>
                 <a:latin typeface="Calibri"/>
               </a:rPr>
-              <a:t>Invariance follows from the operator's form, not from a trained codebook. CI asserts it on three architectures per commit.</a:t>
+              <a:t>'Early warning' means a changed code at a step whose token did not change. It is not a validated predictor of later failure.</a:t>
             </a:r>
           </a:p>
           <a:p>
@@ -4589,13 +5461,13 @@
               </a:spcAft>
             </a:pPr>
             <a:r>
-              <a:rPr sz="1700" b="1">
-                <a:solidFill>
-                  <a:srgbClr val="C1543A"/>
-                </a:solidFill>
-                <a:latin typeface="Calibri"/>
-              </a:rPr>
-              <a:t>Retracted: we previously claimed SEMQ is necessary for the index. It is not. A frozen product quantizer also works.</a:t>
+              <a:rPr sz="1400" b="0">
+                <a:solidFill>
+                  <a:srgbClr val="1B1B1B"/>
+                </a:solidFill>
+                <a:latin typeface="Calibri"/>
+              </a:rPr>
+              <a:t>TF32 and kernel-selection mechanism statements are consistent with the data but were not established by profiling.</a:t>
             </a:r>
           </a:p>
           <a:p>
@@ -4605,13 +5477,29 @@
               </a:spcAft>
             </a:pPr>
             <a:r>
-              <a:rPr sz="1700" b="0">
+              <a:rPr sz="1400" b="0">
                 <a:solidFill>
                   <a:srgbClr val="1B1B1B"/>
                 </a:solidFill>
                 <a:latin typeface="Calibri"/>
               </a:rPr>
-              <a:t>What survives is verification cost: our guarantee is checkable in advance, theirs must be re-measured for every codebook shipped.</a:t>
+              <a:t>Decoding disagreement rates labelled H-bar are packed-byte rates, not bit or coordinate rates.</a:t>
+            </a:r>
+          </a:p>
+          <a:p>
+            <a:pPr>
+              <a:spcAft>
+                <a:spcPts val="1200"/>
+              </a:spcAft>
+            </a:pPr>
+            <a:r>
+              <a:rPr sz="1400" b="0">
+                <a:solidFill>
+                  <a:srgbClr val="6E6E6E"/>
+                </a:solidFill>
+                <a:latin typeface="Calibri"/>
+              </a:rPr>
+              <a:t>Index of superseded statements: docs/RETIRED_CLAIMS.md.</a:t>
             </a:r>
           </a:p>
         </p:txBody>
@@ -4668,7 +5556,7 @@
                 </a:solidFill>
                 <a:latin typeface="Calibri"/>
               </a:rPr>
-              <a:t>MEASUREMENT</a:t>
+              <a:t>INSTRUMENT</a:t>
             </a:r>
           </a:p>
         </p:txBody>
@@ -4707,7 +5595,206 @@
                 </a:solidFill>
                 <a:latin typeface="Calibri"/>
               </a:rPr>
-              <a:t>ARI-R: retrieval quality is blind to a serving change</a:t>
+              <a:t>What SEMQ is, and what it is for</a:t>
+            </a:r>
+          </a:p>
+        </p:txBody>
+      </p:sp>
+      <p:sp>
+        <p:nvSpPr>
+          <p:cNvPr id="4" name="TextBox 3"/>
+          <p:cNvSpPr txBox="1"/>
+          <p:nvPr/>
+        </p:nvSpPr>
+        <p:spPr>
+          <a:xfrm>
+            <a:off x="822960" y="1737360"/>
+            <a:ext cx="10607040" cy="4206240"/>
+          </a:xfrm>
+          <a:prstGeom prst="rect">
+            <a:avLst/>
+          </a:prstGeom>
+          <a:noFill/>
+        </p:spPr>
+        <p:txBody>
+          <a:bodyPr wrap="square">
+            <a:spAutoFit/>
+          </a:bodyPr>
+          <a:lstStyle/>
+          <a:p>
+            <a:pPr>
+              <a:spcAft>
+                <a:spcPts val="1200"/>
+              </a:spcAft>
+            </a:pPr>
+            <a:r>
+              <a:rPr sz="1700" b="1">
+                <a:solidFill>
+                  <a:srgbClr val="1B1B1B"/>
+                </a:solidFill>
+                <a:latin typeface="Calibri"/>
+              </a:rPr>
+              <a:t>SEMQ maps a float vector to a symbolic code by comparing against a calibrated scale.</a:t>
+            </a:r>
+          </a:p>
+          <a:p>
+            <a:pPr>
+              <a:spcAft>
+                <a:spcPts val="1200"/>
+              </a:spcAft>
+            </a:pPr>
+            <a:r>
+              <a:rPr sz="1700" b="0">
+                <a:solidFill>
+                  <a:srgbClr val="1B1B1B"/>
+                </a:solidFill>
+                <a:latin typeface="Calibri"/>
+              </a:rPr>
+              <a:t>Codes are exact, so agreement is a hash comparison rather than a threshold.</a:t>
+            </a:r>
+          </a:p>
+          <a:p>
+            <a:pPr>
+              <a:spcAft>
+                <a:spcPts val="1200"/>
+              </a:spcAft>
+            </a:pPr>
+            <a:r>
+              <a:rPr sz="1700" b="0">
+                <a:solidFill>
+                  <a:srgbClr val="1B1B1B"/>
+                </a:solidFill>
+                <a:latin typeface="Calibri"/>
+              </a:rPr>
+              <a:t>The operator uses one fixed calibration scale, not a trained codebook. Cross-platform invariance still needs verification on each platform.</a:t>
+            </a:r>
+          </a:p>
+          <a:p>
+            <a:pPr>
+              <a:spcAft>
+                <a:spcPts val="1200"/>
+              </a:spcAft>
+            </a:pPr>
+            <a:r>
+              <a:rPr sz="1700" b="1">
+                <a:solidFill>
+                  <a:srgbClr val="C1543A"/>
+                </a:solidFill>
+                <a:latin typeface="Calibri"/>
+              </a:rPr>
+              <a:t>Retracted: we previously claimed SEMQ is necessary for the index. It is not. A frozen product quantizer also works.</a:t>
+            </a:r>
+          </a:p>
+          <a:p>
+            <a:pPr>
+              <a:spcAft>
+                <a:spcPts val="1200"/>
+              </a:spcAft>
+            </a:pPr>
+            <a:r>
+              <a:rPr sz="1700" b="0">
+                <a:solidFill>
+                  <a:srgbClr val="1B1B1B"/>
+                </a:solidFill>
+                <a:latin typeface="Calibri"/>
+              </a:rPr>
+              <a:t>What survives is verification cost: one declared rule and one scalar, against a codebook of thousands of values that each need checking.</a:t>
+            </a:r>
+          </a:p>
+        </p:txBody>
+      </p:sp>
+    </p:spTree>
+  </p:cSld>
+  <p:clrMapOvr>
+    <a:masterClrMapping/>
+  </p:clrMapOvr>
+</p:sld>
+</file>
+
+<file path=ppt/slides/slide4.xml><?xml version="1.0" encoding="utf-8"?>
+<p:sld xmlns:a="http://schemas.openxmlformats.org/drawingml/2006/main" xmlns:p="http://schemas.openxmlformats.org/presentationml/2006/main" xmlns:r="http://schemas.openxmlformats.org/officeDocument/2006/relationships">
+  <p:cSld>
+    <p:spTree>
+      <p:nvGrpSpPr>
+        <p:cNvPr id="1" name=""/>
+        <p:cNvGrpSpPr/>
+        <p:nvPr/>
+      </p:nvGrpSpPr>
+      <p:grpSpPr/>
+      <p:sp>
+        <p:nvSpPr>
+          <p:cNvPr id="2" name="TextBox 1"/>
+          <p:cNvSpPr txBox="1"/>
+          <p:nvPr/>
+        </p:nvSpPr>
+        <p:spPr>
+          <a:xfrm>
+            <a:off x="640080" y="320040"/>
+            <a:ext cx="10972800" cy="320040"/>
+          </a:xfrm>
+          <a:prstGeom prst="rect">
+            <a:avLst/>
+          </a:prstGeom>
+          <a:noFill/>
+        </p:spPr>
+        <p:txBody>
+          <a:bodyPr wrap="square">
+            <a:spAutoFit/>
+          </a:bodyPr>
+          <a:lstStyle/>
+          <a:p>
+            <a:pPr algn="l">
+              <a:spcAft>
+                <a:spcPts val="600"/>
+              </a:spcAft>
+            </a:pPr>
+            <a:r>
+              <a:rPr sz="1200" b="0">
+                <a:solidFill>
+                  <a:srgbClr val="6E6E6E"/>
+                </a:solidFill>
+                <a:latin typeface="Calibri"/>
+              </a:rPr>
+              <a:t>MEASUREMENT</a:t>
+            </a:r>
+          </a:p>
+        </p:txBody>
+      </p:sp>
+      <p:sp>
+        <p:nvSpPr>
+          <p:cNvPr id="3" name="TextBox 2"/>
+          <p:cNvSpPr txBox="1"/>
+          <p:nvPr/>
+        </p:nvSpPr>
+        <p:spPr>
+          <a:xfrm>
+            <a:off x="640080" y="640080"/>
+            <a:ext cx="10972800" cy="822960"/>
+          </a:xfrm>
+          <a:prstGeom prst="rect">
+            <a:avLst/>
+          </a:prstGeom>
+          <a:noFill/>
+        </p:spPr>
+        <p:txBody>
+          <a:bodyPr wrap="square">
+            <a:spAutoFit/>
+          </a:bodyPr>
+          <a:lstStyle/>
+          <a:p>
+            <a:pPr algn="l">
+              <a:spcAft>
+                <a:spcPts val="600"/>
+              </a:spcAft>
+            </a:pPr>
+            <a:r>
+              <a:rPr sz="2800" b="1">
+                <a:solidFill>
+                  <a:srgbClr val="1B1B1B"/>
+                </a:solidFill>
+                <a:latin typeface="Calibri"/>
+              </a:rPr>
+              <a:t>ARI-R: Recall@10 did not detect a serving change</a:t>
             </a:r>
           </a:p>
         </p:txBody>
@@ -4783,7 +5870,7 @@
 </p:sld>
 </file>
 
-<file path=ppt/slides/slide4.xml><?xml version="1.0" encoding="utf-8"?>
+<file path=ppt/slides/slide5.xml><?xml version="1.0" encoding="utf-8"?>
 <p:sld xmlns:a="http://schemas.openxmlformats.org/drawingml/2006/main" xmlns:p="http://schemas.openxmlformats.org/presentationml/2006/main" xmlns:r="http://schemas.openxmlformats.org/officeDocument/2006/relationships">
   <p:cSld>
     <p:spTree>
@@ -5247,7 +6334,7 @@
                 </a:solidFill>
                 <a:latin typeface="Calibri"/>
               </a:rPr>
-              <a:t>The CI on the quality metric is exactly [0.0000, 0.0000]. Not small. Zero.</a:t>
+              <a:t>The paired interval on delta Recall@10 is [0.0000, 0.0000] at 300 queries. A nonsignificant difference is not equivalence.</a:t>
             </a:r>
           </a:p>
           <a:p>
@@ -5263,7 +6350,7 @@
                 </a:solidFill>
                 <a:latin typeface="Calibri"/>
               </a:rPr>
-              <a:t>The TF32-off row is the control. It rules out 'the GPU did it'.</a:t>
+              <a:t>The TF32-off row is the control. It associates the effect with TF32 rather than with the host change alone.</a:t>
             </a:r>
           </a:p>
           <a:p>
@@ -5292,7 +6379,7 @@
 </p:sld>
 </file>
 
-<file path=ppt/slides/slide5.xml><?xml version="1.0" encoding="utf-8"?>
+<file path=ppt/slides/slide6.xml><?xml version="1.0" encoding="utf-8"?>
 <p:sld xmlns:a="http://schemas.openxmlformats.org/drawingml/2006/main" xmlns:p="http://schemas.openxmlformats.org/presentationml/2006/main" xmlns:r="http://schemas.openxmlformats.org/officeDocument/2006/relationships">
   <p:cSld>
     <p:spTree>
@@ -5375,7 +6462,7 @@
                 </a:solidFill>
                 <a:latin typeface="Calibri"/>
               </a:rPr>
-              <a:t>ARI-D: the logits move before the tokens</a:t>
+              <a:t>ARI-D: logit codes change while tokens do not</a:t>
             </a:r>
           </a:p>
         </p:txBody>
@@ -5451,7 +6538,7 @@
 </p:sld>
 </file>
 
-<file path=ppt/slides/slide6.xml><?xml version="1.0" encoding="utf-8"?>
+<file path=ppt/slides/slide7.xml><?xml version="1.0" encoding="utf-8"?>
 <p:sld xmlns:a="http://schemas.openxmlformats.org/drawingml/2006/main" xmlns:p="http://schemas.openxmlformats.org/presentationml/2006/main" xmlns:r="http://schemas.openxmlformats.org/officeDocument/2006/relationships">
   <p:cSld>
     <p:spTree>
@@ -5690,7 +6777,7 @@
 </p:sld>
 </file>
 
-<file path=ppt/slides/slide7.xml><?xml version="1.0" encoding="utf-8"?>
+<file path=ppt/slides/slide8.xml><?xml version="1.0" encoding="utf-8"?>
 <p:sld xmlns:a="http://schemas.openxmlformats.org/drawingml/2006/main" xmlns:p="http://schemas.openxmlformats.org/presentationml/2006/main" xmlns:r="http://schemas.openxmlformats.org/officeDocument/2006/relationships">
   <p:cSld>
     <p:spTree>
@@ -5929,7 +7016,7 @@
 </p:sld>
 </file>
 
-<file path=ppt/slides/slide8.xml><?xml version="1.0" encoding="utf-8"?>
+<file path=ppt/slides/slide9.xml><?xml version="1.0" encoding="utf-8"?>
 <p:sld xmlns:a="http://schemas.openxmlformats.org/drawingml/2006/main" xmlns:p="http://schemas.openxmlformats.org/presentationml/2006/main" xmlns:r="http://schemas.openxmlformats.org/officeDocument/2006/relationships">
   <p:cSld>
     <p:spTree>
@@ -6148,693 +7235,6 @@
                 <a:latin typeface="Calibri"/>
               </a:rPr>
               <a:t>Intervals resample cases, not runs, because runs of one case are not independent.</a:t>
-            </a:r>
-          </a:p>
-        </p:txBody>
-      </p:sp>
-    </p:spTree>
-  </p:cSld>
-  <p:clrMapOvr>
-    <a:masterClrMapping/>
-  </p:clrMapOvr>
-</p:sld>
-</file>
-
-<file path=ppt/slides/slide9.xml><?xml version="1.0" encoding="utf-8"?>
-<p:sld xmlns:a="http://schemas.openxmlformats.org/drawingml/2006/main" xmlns:p="http://schemas.openxmlformats.org/presentationml/2006/main" xmlns:r="http://schemas.openxmlformats.org/officeDocument/2006/relationships">
-  <p:cSld>
-    <p:spTree>
-      <p:nvGrpSpPr>
-        <p:cNvPr id="1" name=""/>
-        <p:cNvGrpSpPr/>
-        <p:nvPr/>
-      </p:nvGrpSpPr>
-      <p:grpSpPr/>
-      <p:sp>
-        <p:nvSpPr>
-          <p:cNvPr id="2" name="TextBox 1"/>
-          <p:cNvSpPr txBox="1"/>
-          <p:nvPr/>
-        </p:nvSpPr>
-        <p:spPr>
-          <a:xfrm>
-            <a:off x="640080" y="320040"/>
-            <a:ext cx="10972800" cy="320040"/>
-          </a:xfrm>
-          <a:prstGeom prst="rect">
-            <a:avLst/>
-          </a:prstGeom>
-          <a:noFill/>
-        </p:spPr>
-        <p:txBody>
-          <a:bodyPr wrap="square">
-            <a:spAutoFit/>
-          </a:bodyPr>
-          <a:lstStyle/>
-          <a:p>
-            <a:pPr algn="l">
-              <a:spcAft>
-                <a:spcPts val="600"/>
-              </a:spcAft>
-            </a:pPr>
-            <a:r>
-              <a:rPr sz="1200" b="0">
-                <a:solidFill>
-                  <a:srgbClr val="6E6E6E"/>
-                </a:solidFill>
-                <a:latin typeface="Calibri"/>
-              </a:rPr>
-              <a:t>MEASUREMENT</a:t>
-            </a:r>
-          </a:p>
-        </p:txBody>
-      </p:sp>
-      <p:sp>
-        <p:nvSpPr>
-          <p:cNvPr id="3" name="TextBox 2"/>
-          <p:cNvSpPr txBox="1"/>
-          <p:nvPr/>
-        </p:nvSpPr>
-        <p:spPr>
-          <a:xfrm>
-            <a:off x="640080" y="640080"/>
-            <a:ext cx="10972800" cy="822960"/>
-          </a:xfrm>
-          <a:prstGeom prst="rect">
-            <a:avLst/>
-          </a:prstGeom>
-          <a:noFill/>
-        </p:spPr>
-        <p:txBody>
-          <a:bodyPr wrap="square">
-            <a:spAutoFit/>
-          </a:bodyPr>
-          <a:lstStyle/>
-          <a:p>
-            <a:pPr algn="l">
-              <a:spcAft>
-                <a:spcPts val="600"/>
-              </a:spcAft>
-            </a:pPr>
-            <a:r>
-              <a:rPr sz="2800" b="1">
-                <a:solidFill>
-                  <a:srgbClr val="1B1B1B"/>
-                </a:solidFill>
-                <a:latin typeface="Calibri"/>
-              </a:rPr>
-              <a:t>ARI-E: measured on 22,000 real agent runs</a:t>
-            </a:r>
-          </a:p>
-        </p:txBody>
-      </p:sp>
-      <p:graphicFrame>
-        <p:nvGraphicFramePr>
-          <p:cNvPr id="4" name="Table 3"/>
-          <p:cNvGraphicFramePr>
-            <a:graphicFrameLocks noGrp="1"/>
-          </p:cNvGraphicFramePr>
-          <p:nvPr/>
-        </p:nvGraphicFramePr>
-        <p:xfrm>
-          <a:off x="822960" y="1828800"/>
-          <a:ext cx="10515600" cy="2834640"/>
-        </p:xfrm>
-        <a:graphic>
-          <a:graphicData uri="http://schemas.openxmlformats.org/drawingml/2006/table">
-            <a:tbl>
-              <a:tblPr firstRow="1" bandRow="1">
-                <a:tableStyleId>{5C22544A-7EE6-4342-B048-85BDC9FD1C3A}</a:tableStyleId>
-              </a:tblPr>
-              <a:tblGrid>
-                <a:gridCol w="1752600"/>
-                <a:gridCol w="1752600"/>
-                <a:gridCol w="1752600"/>
-                <a:gridCol w="1752600"/>
-                <a:gridCol w="1752600"/>
-                <a:gridCol w="1752600"/>
-              </a:tblGrid>
-              <a:tr h="566928">
-                <a:tc>
-                  <a:txBody>
-                    <a:bodyPr/>
-                    <a:lstStyle/>
-                    <a:p>
-                      <a:pPr algn="l"/>
-                      <a:r>
-                        <a:rPr sz="1200" b="1">
-                          <a:latin typeface="Calibri"/>
-                        </a:rPr>
-                        <a:t>Contrast</a:t>
-                      </a:r>
-                    </a:p>
-                  </a:txBody>
-                  <a:tcPr/>
-                </a:tc>
-                <a:tc>
-                  <a:txBody>
-                    <a:bodyPr/>
-                    <a:lstStyle/>
-                    <a:p>
-                      <a:pPr algn="r"/>
-                      <a:r>
-                        <a:rPr sz="1200" b="1">
-                          <a:latin typeface="Calibri"/>
-                        </a:rPr>
-                        <a:t>Cases</a:t>
-                      </a:r>
-                    </a:p>
-                  </a:txBody>
-                  <a:tcPr/>
-                </a:tc>
-                <a:tc>
-                  <a:txBody>
-                    <a:bodyPr/>
-                    <a:lstStyle/>
-                    <a:p>
-                      <a:pPr algn="r"/>
-                      <a:r>
-                        <a:rPr sz="1200" b="1">
-                          <a:latin typeface="Calibri"/>
-                        </a:rPr>
-                        <a:t>Self</a:t>
-                      </a:r>
-                    </a:p>
-                  </a:txBody>
-                  <a:tcPr/>
-                </a:tc>
-                <a:tc>
-                  <a:txBody>
-                    <a:bodyPr/>
-                    <a:lstStyle/>
-                    <a:p>
-                      <a:pPr algn="r"/>
-                      <a:r>
-                        <a:rPr sz="1200" b="1">
-                          <a:latin typeface="Calibri"/>
-                        </a:rPr>
-                        <a:t>Cross</a:t>
-                      </a:r>
-                    </a:p>
-                  </a:txBody>
-                  <a:tcPr/>
-                </a:tc>
-                <a:tc>
-                  <a:txBody>
-                    <a:bodyPr/>
-                    <a:lstStyle/>
-                    <a:p>
-                      <a:pPr algn="r"/>
-                      <a:r>
-                        <a:rPr sz="1200" b="1">
-                          <a:latin typeface="Calibri"/>
-                        </a:rPr>
-                        <a:t>Effect</a:t>
-                      </a:r>
-                    </a:p>
-                  </a:txBody>
-                  <a:tcPr/>
-                </a:tc>
-                <a:tc>
-                  <a:txBody>
-                    <a:bodyPr/>
-                    <a:lstStyle/>
-                    <a:p>
-                      <a:pPr algn="r"/>
-                      <a:r>
-                        <a:rPr sz="1200" b="1">
-                          <a:latin typeface="Calibri"/>
-                        </a:rPr>
-                        <a:t>95% CI</a:t>
-                      </a:r>
-                    </a:p>
-                  </a:txBody>
-                  <a:tcPr/>
-                </a:tc>
-              </a:tr>
-              <a:tr h="566928">
-                <a:tc>
-                  <a:txBody>
-                    <a:bodyPr/>
-                    <a:lstStyle/>
-                    <a:p>
-                      <a:pPr algn="l"/>
-                      <a:r>
-                        <a:rPr sz="1200" b="0">
-                          <a:latin typeface="Calibri"/>
-                        </a:rPr>
-                        <a:t>scaffold model=qwen35_122b</a:t>
-                      </a:r>
-                    </a:p>
-                  </a:txBody>
-                  <a:tcPr/>
-                </a:tc>
-                <a:tc>
-                  <a:txBody>
-                    <a:bodyPr/>
-                    <a:lstStyle/>
-                    <a:p>
-                      <a:pPr algn="r"/>
-                      <a:r>
-                        <a:rPr sz="1200" b="0">
-                          <a:latin typeface="Calibri"/>
-                        </a:rPr>
-                        <a:t>10,788</a:t>
-                      </a:r>
-                    </a:p>
-                  </a:txBody>
-                  <a:tcPr/>
-                </a:tc>
-                <a:tc>
-                  <a:txBody>
-                    <a:bodyPr/>
-                    <a:lstStyle/>
-                    <a:p>
-                      <a:pPr algn="r"/>
-                      <a:r>
-                        <a:rPr sz="1200" b="0">
-                          <a:latin typeface="Calibri"/>
-                        </a:rPr>
-                        <a:t>0.874</a:t>
-                      </a:r>
-                    </a:p>
-                  </a:txBody>
-                  <a:tcPr/>
-                </a:tc>
-                <a:tc>
-                  <a:txBody>
-                    <a:bodyPr/>
-                    <a:lstStyle/>
-                    <a:p>
-                      <a:pPr algn="r"/>
-                      <a:r>
-                        <a:rPr sz="1200" b="0">
-                          <a:latin typeface="Calibri"/>
-                        </a:rPr>
-                        <a:t>0.785</a:t>
-                      </a:r>
-                    </a:p>
-                  </a:txBody>
-                  <a:tcPr/>
-                </a:tc>
-                <a:tc>
-                  <a:txBody>
-                    <a:bodyPr/>
-                    <a:lstStyle/>
-                    <a:p>
-                      <a:pPr algn="r"/>
-                      <a:r>
-                        <a:rPr sz="1200" b="0">
-                          <a:latin typeface="Calibri"/>
-                        </a:rPr>
-                        <a:t>+0.089</a:t>
-                      </a:r>
-                    </a:p>
-                  </a:txBody>
-                  <a:tcPr/>
-                </a:tc>
-                <a:tc>
-                  <a:txBody>
-                    <a:bodyPr/>
-                    <a:lstStyle/>
-                    <a:p>
-                      <a:pPr algn="r"/>
-                      <a:r>
-                        <a:rPr sz="1200" b="0">
-                          <a:latin typeface="Calibri"/>
-                        </a:rPr>
-                        <a:t>[+0.083, +0.094]</a:t>
-                      </a:r>
-                    </a:p>
-                  </a:txBody>
-                  <a:tcPr/>
-                </a:tc>
-              </a:tr>
-              <a:tr h="566928">
-                <a:tc>
-                  <a:txBody>
-                    <a:bodyPr/>
-                    <a:lstStyle/>
-                    <a:p>
-                      <a:pPr algn="l"/>
-                      <a:r>
-                        <a:rPr sz="1200" b="0">
-                          <a:latin typeface="Calibri"/>
-                        </a:rPr>
-                        <a:t>scaffold model=minimax_m25</a:t>
-                      </a:r>
-                    </a:p>
-                  </a:txBody>
-                  <a:tcPr/>
-                </a:tc>
-                <a:tc>
-                  <a:txBody>
-                    <a:bodyPr/>
-                    <a:lstStyle/>
-                    <a:p>
-                      <a:pPr algn="r"/>
-                      <a:r>
-                        <a:rPr sz="1200" b="0">
-                          <a:latin typeface="Calibri"/>
-                        </a:rPr>
-                        <a:t>12,195</a:t>
-                      </a:r>
-                    </a:p>
-                  </a:txBody>
-                  <a:tcPr/>
-                </a:tc>
-                <a:tc>
-                  <a:txBody>
-                    <a:bodyPr/>
-                    <a:lstStyle/>
-                    <a:p>
-                      <a:pPr algn="r"/>
-                      <a:r>
-                        <a:rPr sz="1200" b="0">
-                          <a:latin typeface="Calibri"/>
-                        </a:rPr>
-                        <a:t>0.899</a:t>
-                      </a:r>
-                    </a:p>
-                  </a:txBody>
-                  <a:tcPr/>
-                </a:tc>
-                <a:tc>
-                  <a:txBody>
-                    <a:bodyPr/>
-                    <a:lstStyle/>
-                    <a:p>
-                      <a:pPr algn="r"/>
-                      <a:r>
-                        <a:rPr sz="1200" b="0">
-                          <a:latin typeface="Calibri"/>
-                        </a:rPr>
-                        <a:t>0.849</a:t>
-                      </a:r>
-                    </a:p>
-                  </a:txBody>
-                  <a:tcPr/>
-                </a:tc>
-                <a:tc>
-                  <a:txBody>
-                    <a:bodyPr/>
-                    <a:lstStyle/>
-                    <a:p>
-                      <a:pPr algn="r"/>
-                      <a:r>
-                        <a:rPr sz="1200" b="0">
-                          <a:latin typeface="Calibri"/>
-                        </a:rPr>
-                        <a:t>+0.050</a:t>
-                      </a:r>
-                    </a:p>
-                  </a:txBody>
-                  <a:tcPr/>
-                </a:tc>
-                <a:tc>
-                  <a:txBody>
-                    <a:bodyPr/>
-                    <a:lstStyle/>
-                    <a:p>
-                      <a:pPr algn="r"/>
-                      <a:r>
-                        <a:rPr sz="1200" b="0">
-                          <a:latin typeface="Calibri"/>
-                        </a:rPr>
-                        <a:t>[+0.044, +0.052]</a:t>
-                      </a:r>
-                    </a:p>
-                  </a:txBody>
-                  <a:tcPr/>
-                </a:tc>
-              </a:tr>
-              <a:tr h="566928">
-                <a:tc>
-                  <a:txBody>
-                    <a:bodyPr/>
-                    <a:lstStyle/>
-                    <a:p>
-                      <a:pPr algn="l"/>
-                      <a:r>
-                        <a:rPr sz="1200" b="0">
-                          <a:latin typeface="Calibri"/>
-                        </a:rPr>
-                        <a:t>model, scaffold=sweagent</a:t>
-                      </a:r>
-                    </a:p>
-                  </a:txBody>
-                  <a:tcPr/>
-                </a:tc>
-                <a:tc>
-                  <a:txBody>
-                    <a:bodyPr/>
-                    <a:lstStyle/>
-                    <a:p>
-                      <a:pPr algn="r"/>
-                      <a:r>
-                        <a:rPr sz="1200" b="0">
-                          <a:latin typeface="Calibri"/>
-                        </a:rPr>
-                        <a:t>10,674</a:t>
-                      </a:r>
-                    </a:p>
-                  </a:txBody>
-                  <a:tcPr/>
-                </a:tc>
-                <a:tc>
-                  <a:txBody>
-                    <a:bodyPr/>
-                    <a:lstStyle/>
-                    <a:p>
-                      <a:pPr algn="r"/>
-                      <a:r>
-                        <a:rPr sz="1200" b="0">
-                          <a:latin typeface="Calibri"/>
-                        </a:rPr>
-                        <a:t>0.880</a:t>
-                      </a:r>
-                    </a:p>
-                  </a:txBody>
-                  <a:tcPr/>
-                </a:tc>
-                <a:tc>
-                  <a:txBody>
-                    <a:bodyPr/>
-                    <a:lstStyle/>
-                    <a:p>
-                      <a:pPr algn="r"/>
-                      <a:r>
-                        <a:rPr sz="1200" b="0">
-                          <a:latin typeface="Calibri"/>
-                        </a:rPr>
-                        <a:t>0.839</a:t>
-                      </a:r>
-                    </a:p>
-                  </a:txBody>
-                  <a:tcPr/>
-                </a:tc>
-                <a:tc>
-                  <a:txBody>
-                    <a:bodyPr/>
-                    <a:lstStyle/>
-                    <a:p>
-                      <a:pPr algn="r"/>
-                      <a:r>
-                        <a:rPr sz="1200" b="0">
-                          <a:latin typeface="Calibri"/>
-                        </a:rPr>
-                        <a:t>+0.041</a:t>
-                      </a:r>
-                    </a:p>
-                  </a:txBody>
-                  <a:tcPr/>
-                </a:tc>
-                <a:tc>
-                  <a:txBody>
-                    <a:bodyPr/>
-                    <a:lstStyle/>
-                    <a:p>
-                      <a:pPr algn="r"/>
-                      <a:r>
-                        <a:rPr sz="1200" b="0">
-                          <a:latin typeface="Calibri"/>
-                        </a:rPr>
-                        <a:t>[+0.039, +0.046]</a:t>
-                      </a:r>
-                    </a:p>
-                  </a:txBody>
-                  <a:tcPr/>
-                </a:tc>
-              </a:tr>
-              <a:tr h="566928">
-                <a:tc>
-                  <a:txBody>
-                    <a:bodyPr/>
-                    <a:lstStyle/>
-                    <a:p>
-                      <a:pPr algn="l"/>
-                      <a:r>
-                        <a:rPr sz="1200" b="0">
-                          <a:latin typeface="Calibri"/>
-                        </a:rPr>
-                        <a:t>model, scaffold=openhands</a:t>
-                      </a:r>
-                    </a:p>
-                  </a:txBody>
-                  <a:tcPr/>
-                </a:tc>
-                <a:tc>
-                  <a:txBody>
-                    <a:bodyPr/>
-                    <a:lstStyle/>
-                    <a:p>
-                      <a:pPr algn="r"/>
-                      <a:r>
-                        <a:rPr sz="1200" b="0">
-                          <a:latin typeface="Calibri"/>
-                        </a:rPr>
-                        <a:t>11,933</a:t>
-                      </a:r>
-                    </a:p>
-                  </a:txBody>
-                  <a:tcPr/>
-                </a:tc>
-                <a:tc>
-                  <a:txBody>
-                    <a:bodyPr/>
-                    <a:lstStyle/>
-                    <a:p>
-                      <a:pPr algn="r"/>
-                      <a:r>
-                        <a:rPr sz="1200" b="0">
-                          <a:latin typeface="Calibri"/>
-                        </a:rPr>
-                        <a:t>0.892</a:t>
-                      </a:r>
-                    </a:p>
-                  </a:txBody>
-                  <a:tcPr/>
-                </a:tc>
-                <a:tc>
-                  <a:txBody>
-                    <a:bodyPr/>
-                    <a:lstStyle/>
-                    <a:p>
-                      <a:pPr algn="r"/>
-                      <a:r>
-                        <a:rPr sz="1200" b="0">
-                          <a:latin typeface="Calibri"/>
-                        </a:rPr>
-                        <a:t>0.833</a:t>
-                      </a:r>
-                    </a:p>
-                  </a:txBody>
-                  <a:tcPr/>
-                </a:tc>
-                <a:tc>
-                  <a:txBody>
-                    <a:bodyPr/>
-                    <a:lstStyle/>
-                    <a:p>
-                      <a:pPr algn="r"/>
-                      <a:r>
-                        <a:rPr sz="1200" b="0">
-                          <a:latin typeface="Calibri"/>
-                        </a:rPr>
-                        <a:t>+0.059</a:t>
-                      </a:r>
-                    </a:p>
-                  </a:txBody>
-                  <a:tcPr/>
-                </a:tc>
-                <a:tc>
-                  <a:txBody>
-                    <a:bodyPr/>
-                    <a:lstStyle/>
-                    <a:p>
-                      <a:pPr algn="r"/>
-                      <a:r>
-                        <a:rPr sz="1200" b="0">
-                          <a:latin typeface="Calibri"/>
-                        </a:rPr>
-                        <a:t>[+0.054, +0.062]</a:t>
-                      </a:r>
-                    </a:p>
-                  </a:txBody>
-                  <a:tcPr/>
-                </a:tc>
-              </a:tr>
-            </a:tbl>
-          </a:graphicData>
-        </a:graphic>
-      </p:graphicFrame>
-      <p:sp>
-        <p:nvSpPr>
-          <p:cNvPr id="5" name="TextBox 4"/>
-          <p:cNvSpPr txBox="1"/>
-          <p:nvPr/>
-        </p:nvSpPr>
-        <p:spPr>
-          <a:xfrm>
-            <a:off x="822960" y="4480560"/>
-            <a:ext cx="10607040" cy="4206240"/>
-          </a:xfrm>
-          <a:prstGeom prst="rect">
-            <a:avLst/>
-          </a:prstGeom>
-          <a:noFill/>
-        </p:spPr>
-        <p:txBody>
-          <a:bodyPr wrap="square">
-            <a:spAutoFit/>
-          </a:bodyPr>
-          <a:lstStyle/>
-          <a:p>
-            <a:pPr>
-              <a:spcAft>
-                <a:spcPts val="1200"/>
-              </a:spcAft>
-            </a:pPr>
-            <a:r>
-              <a:rPr sz="1400" b="0">
-                <a:solidFill>
-                  <a:srgbClr val="1B1B1B"/>
-                </a:solidFill>
-                <a:latin typeface="Calibri"/>
-              </a:rPr>
-              <a:t>Source: nvidia/Open-SWE-Traces. SWE-agent and OpenHands, crossed with two models. Neither scaffold was built by us.</a:t>
-            </a:r>
-          </a:p>
-          <a:p>
-            <a:pPr>
-              <a:spcAft>
-                <a:spcPts val="1200"/>
-              </a:spcAft>
-            </a:pPr>
-            <a:r>
-              <a:rPr sz="1400" b="0">
-                <a:solidFill>
-                  <a:srgbClr val="1B1B1B"/>
-                </a:solidFill>
-                <a:latin typeface="Calibri"/>
-              </a:rPr>
-              <a:t>Outcome is the repository's own test suite, which the agent never saw.</a:t>
-            </a:r>
-          </a:p>
-          <a:p>
-            <a:pPr>
-              <a:spcAft>
-                <a:spcPts val="1200"/>
-              </a:spcAft>
-            </a:pPr>
-            <a:r>
-              <a:rPr sz="1400" b="1">
-                <a:solidFill>
-                  <a:srgbClr val="C1543A"/>
-                </a:solidFill>
-                <a:latin typeface="Calibri"/>
-              </a:rPr>
-              <a:t>Largest threat: 22% of rows were ungraded and dropped. If grading failure tracks difficulty, the surviving set is easier.</a:t>
             </a:r>
           </a:p>
         </p:txBody>

--- a/docs/deck/ari-technical.pptx
+++ b/docs/deck/ari-technical.pptx
@@ -14,9 +14,6 @@
     <p:sldId id="262" r:id="rId13"/>
     <p:sldId id="263" r:id="rId14"/>
     <p:sldId id="264" r:id="rId15"/>
-    <p:sldId id="265" r:id="rId16"/>
-    <p:sldId id="266" r:id="rId17"/>
-    <p:sldId id="267" r:id="rId18"/>
   </p:sldIdLst>
   <p:sldSz cx="12191695" cy="6858000" type="screen4x3"/>
   <p:notesSz cx="6858000" cy="9144000"/>
@@ -3212,1207 +3209,6 @@
                 <a:latin typeface="Calibri"/>
               </a:rPr>
               <a:t>Reports are Ed25519-signed. Verification is independent of our SDK.</a:t>
-            </a:r>
-          </a:p>
-        </p:txBody>
-      </p:sp>
-    </p:spTree>
-  </p:cSld>
-  <p:clrMapOvr>
-    <a:masterClrMapping/>
-  </p:clrMapOvr>
-</p:sld>
-</file>
-
-<file path=ppt/slides/slide10.xml><?xml version="1.0" encoding="utf-8"?>
-<p:sld xmlns:a="http://schemas.openxmlformats.org/drawingml/2006/main" xmlns:p="http://schemas.openxmlformats.org/presentationml/2006/main" xmlns:r="http://schemas.openxmlformats.org/officeDocument/2006/relationships">
-  <p:cSld>
-    <p:spTree>
-      <p:nvGrpSpPr>
-        <p:cNvPr id="1" name=""/>
-        <p:cNvGrpSpPr/>
-        <p:nvPr/>
-      </p:nvGrpSpPr>
-      <p:grpSpPr/>
-      <p:sp>
-        <p:nvSpPr>
-          <p:cNvPr id="2" name="TextBox 1"/>
-          <p:cNvSpPr txBox="1"/>
-          <p:nvPr/>
-        </p:nvSpPr>
-        <p:spPr>
-          <a:xfrm>
-            <a:off x="640080" y="320040"/>
-            <a:ext cx="10972800" cy="320040"/>
-          </a:xfrm>
-          <a:prstGeom prst="rect">
-            <a:avLst/>
-          </a:prstGeom>
-          <a:noFill/>
-        </p:spPr>
-        <p:txBody>
-          <a:bodyPr wrap="square">
-            <a:spAutoFit/>
-          </a:bodyPr>
-          <a:lstStyle/>
-          <a:p>
-            <a:pPr algn="l">
-              <a:spcAft>
-                <a:spcPts val="600"/>
-              </a:spcAft>
-            </a:pPr>
-            <a:r>
-              <a:rPr sz="1200" b="0">
-                <a:solidFill>
-                  <a:srgbClr val="6E6E6E"/>
-                </a:solidFill>
-                <a:latin typeface="Calibri"/>
-              </a:rPr>
-              <a:t>POWER</a:t>
-            </a:r>
-          </a:p>
-        </p:txBody>
-      </p:sp>
-      <p:sp>
-        <p:nvSpPr>
-          <p:cNvPr id="3" name="TextBox 2"/>
-          <p:cNvSpPr txBox="1"/>
-          <p:nvPr/>
-        </p:nvSpPr>
-        <p:spPr>
-          <a:xfrm>
-            <a:off x="640080" y="640080"/>
-            <a:ext cx="10972800" cy="822960"/>
-          </a:xfrm>
-          <a:prstGeom prst="rect">
-            <a:avLst/>
-          </a:prstGeom>
-          <a:noFill/>
-        </p:spPr>
-        <p:txBody>
-          <a:bodyPr wrap="square">
-            <a:spAutoFit/>
-          </a:bodyPr>
-          <a:lstStyle/>
-          <a:p>
-            <a:pPr algn="l">
-              <a:spcAft>
-                <a:spcPts val="600"/>
-              </a:spcAft>
-            </a:pPr>
-            <a:r>
-              <a:rPr sz="2800" b="1">
-                <a:solidFill>
-                  <a:srgbClr val="1B1B1B"/>
-                </a:solidFill>
-                <a:latin typeface="Calibri"/>
-              </a:rPr>
-              <a:t>ARI-E: why the earlier plan would have failed</a:t>
-            </a:r>
-          </a:p>
-        </p:txBody>
-      </p:sp>
-      <p:graphicFrame>
-        <p:nvGraphicFramePr>
-          <p:cNvPr id="4" name="Table 3"/>
-          <p:cNvGraphicFramePr>
-            <a:graphicFrameLocks noGrp="1"/>
-          </p:cNvGraphicFramePr>
-          <p:nvPr/>
-        </p:nvGraphicFramePr>
-        <p:xfrm>
-          <a:off x="822960" y="1828800"/>
-          <a:ext cx="10515600" cy="2971800"/>
-        </p:xfrm>
-        <a:graphic>
-          <a:graphicData uri="http://schemas.openxmlformats.org/drawingml/2006/table">
-            <a:tbl>
-              <a:tblPr firstRow="1" bandRow="1">
-                <a:tableStyleId>{5C22544A-7EE6-4342-B048-85BDC9FD1C3A}</a:tableStyleId>
-              </a:tblPr>
-              <a:tblGrid>
-                <a:gridCol w="2103120"/>
-                <a:gridCol w="2103120"/>
-                <a:gridCol w="2103120"/>
-                <a:gridCol w="2103120"/>
-                <a:gridCol w="2103120"/>
-              </a:tblGrid>
-              <a:tr h="594360">
-                <a:tc>
-                  <a:txBody>
-                    <a:bodyPr/>
-                    <a:lstStyle/>
-                    <a:p>
-                      <a:pPr algn="l"/>
-                      <a:r>
-                        <a:rPr sz="1400" b="1">
-                          <a:latin typeface="Calibri"/>
-                        </a:rPr>
-                        <a:t>Pass-rate gap</a:t>
-                      </a:r>
-                    </a:p>
-                  </a:txBody>
-                  <a:tcPr/>
-                </a:tc>
-                <a:tc>
-                  <a:txBody>
-                    <a:bodyPr/>
-                    <a:lstStyle/>
-                    <a:p>
-                      <a:pPr algn="r"/>
-                      <a:r>
-                        <a:rPr sz="1400" b="1">
-                          <a:latin typeface="Calibri"/>
-                        </a:rPr>
-                        <a:t>Repeats</a:t>
-                      </a:r>
-                    </a:p>
-                  </a:txBody>
-                  <a:tcPr/>
-                </a:tc>
-                <a:tc>
-                  <a:txBody>
-                    <a:bodyPr/>
-                    <a:lstStyle/>
-                    <a:p>
-                      <a:pPr algn="r"/>
-                      <a:r>
-                        <a:rPr sz="1400" b="1">
-                          <a:latin typeface="Calibri"/>
-                        </a:rPr>
-                        <a:t>25 cases</a:t>
-                      </a:r>
-                    </a:p>
-                  </a:txBody>
-                  <a:tcPr/>
-                </a:tc>
-                <a:tc>
-                  <a:txBody>
-                    <a:bodyPr/>
-                    <a:lstStyle/>
-                    <a:p>
-                      <a:pPr algn="r"/>
-                      <a:r>
-                        <a:rPr sz="1400" b="1">
-                          <a:latin typeface="Calibri"/>
-                        </a:rPr>
-                        <a:t>100 cases</a:t>
-                      </a:r>
-                    </a:p>
-                  </a:txBody>
-                  <a:tcPr/>
-                </a:tc>
-                <a:tc>
-                  <a:txBody>
-                    <a:bodyPr/>
-                    <a:lstStyle/>
-                    <a:p>
-                      <a:pPr algn="r"/>
-                      <a:r>
-                        <a:rPr sz="1400" b="1">
-                          <a:latin typeface="Calibri"/>
-                        </a:rPr>
-                        <a:t>200 cases</a:t>
-                      </a:r>
-                    </a:p>
-                  </a:txBody>
-                  <a:tcPr/>
-                </a:tc>
-              </a:tr>
-              <a:tr h="594360">
-                <a:tc>
-                  <a:txBody>
-                    <a:bodyPr/>
-                    <a:lstStyle/>
-                    <a:p>
-                      <a:pPr algn="l"/>
-                      <a:r>
-                        <a:rPr sz="1400" b="0">
-                          <a:latin typeface="Calibri"/>
-                        </a:rPr>
-                        <a:t>0.00 (null)</a:t>
-                      </a:r>
-                    </a:p>
-                  </a:txBody>
-                  <a:tcPr/>
-                </a:tc>
-                <a:tc>
-                  <a:txBody>
-                    <a:bodyPr/>
-                    <a:lstStyle/>
-                    <a:p>
-                      <a:pPr algn="r"/>
-                      <a:r>
-                        <a:rPr sz="1400" b="0">
-                          <a:latin typeface="Calibri"/>
-                        </a:rPr>
-                        <a:t>2</a:t>
-                      </a:r>
-                    </a:p>
-                  </a:txBody>
-                  <a:tcPr/>
-                </a:tc>
-                <a:tc>
-                  <a:txBody>
-                    <a:bodyPr/>
-                    <a:lstStyle/>
-                    <a:p>
-                      <a:pPr algn="r"/>
-                      <a:r>
-                        <a:rPr sz="1400" b="0">
-                          <a:latin typeface="Calibri"/>
-                        </a:rPr>
-                        <a:t>8%</a:t>
-                      </a:r>
-                    </a:p>
-                  </a:txBody>
-                  <a:tcPr/>
-                </a:tc>
-                <a:tc>
-                  <a:txBody>
-                    <a:bodyPr/>
-                    <a:lstStyle/>
-                    <a:p>
-                      <a:pPr algn="r"/>
-                      <a:r>
-                        <a:rPr sz="1400" b="0">
-                          <a:latin typeface="Calibri"/>
-                        </a:rPr>
-                        <a:t>6%</a:t>
-                      </a:r>
-                    </a:p>
-                  </a:txBody>
-                  <a:tcPr/>
-                </a:tc>
-                <a:tc>
-                  <a:txBody>
-                    <a:bodyPr/>
-                    <a:lstStyle/>
-                    <a:p>
-                      <a:pPr algn="r"/>
-                      <a:r>
-                        <a:rPr sz="1400" b="0">
-                          <a:latin typeface="Calibri"/>
-                        </a:rPr>
-                        <a:t>6%</a:t>
-                      </a:r>
-                    </a:p>
-                  </a:txBody>
-                  <a:tcPr/>
-                </a:tc>
-              </a:tr>
-              <a:tr h="594360">
-                <a:tc>
-                  <a:txBody>
-                    <a:bodyPr/>
-                    <a:lstStyle/>
-                    <a:p>
-                      <a:pPr algn="l"/>
-                      <a:r>
-                        <a:rPr sz="1400" b="0">
-                          <a:solidFill>
-                            <a:srgbClr val="C1543A"/>
-                          </a:solidFill>
-                          <a:latin typeface="Calibri"/>
-                        </a:rPr>
-                        <a:t>0.20</a:t>
-                      </a:r>
-                    </a:p>
-                  </a:txBody>
-                  <a:tcPr/>
-                </a:tc>
-                <a:tc>
-                  <a:txBody>
-                    <a:bodyPr/>
-                    <a:lstStyle/>
-                    <a:p>
-                      <a:pPr algn="r"/>
-                      <a:r>
-                        <a:rPr sz="1400" b="0">
-                          <a:solidFill>
-                            <a:srgbClr val="C1543A"/>
-                          </a:solidFill>
-                          <a:latin typeface="Calibri"/>
-                        </a:rPr>
-                        <a:t>2</a:t>
-                      </a:r>
-                    </a:p>
-                  </a:txBody>
-                  <a:tcPr/>
-                </a:tc>
-                <a:tc>
-                  <a:txBody>
-                    <a:bodyPr/>
-                    <a:lstStyle/>
-                    <a:p>
-                      <a:pPr algn="r"/>
-                      <a:r>
-                        <a:rPr sz="1400" b="0">
-                          <a:solidFill>
-                            <a:srgbClr val="C1543A"/>
-                          </a:solidFill>
-                          <a:latin typeface="Calibri"/>
-                        </a:rPr>
-                        <a:t>8%</a:t>
-                      </a:r>
-                    </a:p>
-                  </a:txBody>
-                  <a:tcPr/>
-                </a:tc>
-                <a:tc>
-                  <a:txBody>
-                    <a:bodyPr/>
-                    <a:lstStyle/>
-                    <a:p>
-                      <a:pPr algn="r"/>
-                      <a:r>
-                        <a:rPr sz="1400" b="0">
-                          <a:solidFill>
-                            <a:srgbClr val="C1543A"/>
-                          </a:solidFill>
-                          <a:latin typeface="Calibri"/>
-                        </a:rPr>
-                        <a:t>11%</a:t>
-                      </a:r>
-                    </a:p>
-                  </a:txBody>
-                  <a:tcPr/>
-                </a:tc>
-                <a:tc>
-                  <a:txBody>
-                    <a:bodyPr/>
-                    <a:lstStyle/>
-                    <a:p>
-                      <a:pPr algn="r"/>
-                      <a:r>
-                        <a:rPr sz="1400" b="0">
-                          <a:solidFill>
-                            <a:srgbClr val="C1543A"/>
-                          </a:solidFill>
-                          <a:latin typeface="Calibri"/>
-                        </a:rPr>
-                        <a:t>37%</a:t>
-                      </a:r>
-                    </a:p>
-                  </a:txBody>
-                  <a:tcPr/>
-                </a:tc>
-              </a:tr>
-              <a:tr h="594360">
-                <a:tc>
-                  <a:txBody>
-                    <a:bodyPr/>
-                    <a:lstStyle/>
-                    <a:p>
-                      <a:pPr algn="l"/>
-                      <a:r>
-                        <a:rPr sz="1400" b="0">
-                          <a:latin typeface="Calibri"/>
-                        </a:rPr>
-                        <a:t>0.20</a:t>
-                      </a:r>
-                    </a:p>
-                  </a:txBody>
-                  <a:tcPr/>
-                </a:tc>
-                <a:tc>
-                  <a:txBody>
-                    <a:bodyPr/>
-                    <a:lstStyle/>
-                    <a:p>
-                      <a:pPr algn="r"/>
-                      <a:r>
-                        <a:rPr sz="1400" b="0">
-                          <a:latin typeface="Calibri"/>
-                        </a:rPr>
-                        <a:t>5</a:t>
-                      </a:r>
-                    </a:p>
-                  </a:txBody>
-                  <a:tcPr/>
-                </a:tc>
-                <a:tc>
-                  <a:txBody>
-                    <a:bodyPr/>
-                    <a:lstStyle/>
-                    <a:p>
-                      <a:pPr algn="r"/>
-                      <a:r>
-                        <a:rPr sz="1400" b="0">
-                          <a:latin typeface="Calibri"/>
-                        </a:rPr>
-                        <a:t>23%</a:t>
-                      </a:r>
-                    </a:p>
-                  </a:txBody>
-                  <a:tcPr/>
-                </a:tc>
-                <a:tc>
-                  <a:txBody>
-                    <a:bodyPr/>
-                    <a:lstStyle/>
-                    <a:p>
-                      <a:pPr algn="r"/>
-                      <a:r>
-                        <a:rPr sz="1400" b="0">
-                          <a:latin typeface="Calibri"/>
-                        </a:rPr>
-                        <a:t>74%</a:t>
-                      </a:r>
-                    </a:p>
-                  </a:txBody>
-                  <a:tcPr/>
-                </a:tc>
-                <a:tc>
-                  <a:txBody>
-                    <a:bodyPr/>
-                    <a:lstStyle/>
-                    <a:p>
-                      <a:pPr algn="r"/>
-                      <a:r>
-                        <a:rPr sz="1400" b="0">
-                          <a:latin typeface="Calibri"/>
-                        </a:rPr>
-                        <a:t>96%</a:t>
-                      </a:r>
-                    </a:p>
-                  </a:txBody>
-                  <a:tcPr/>
-                </a:tc>
-              </a:tr>
-              <a:tr h="594360">
-                <a:tc>
-                  <a:txBody>
-                    <a:bodyPr/>
-                    <a:lstStyle/>
-                    <a:p>
-                      <a:pPr algn="l"/>
-                      <a:r>
-                        <a:rPr sz="1400" b="0">
-                          <a:latin typeface="Calibri"/>
-                        </a:rPr>
-                        <a:t>0.40</a:t>
-                      </a:r>
-                    </a:p>
-                  </a:txBody>
-                  <a:tcPr/>
-                </a:tc>
-                <a:tc>
-                  <a:txBody>
-                    <a:bodyPr/>
-                    <a:lstStyle/>
-                    <a:p>
-                      <a:pPr algn="r"/>
-                      <a:r>
-                        <a:rPr sz="1400" b="0">
-                          <a:latin typeface="Calibri"/>
-                        </a:rPr>
-                        <a:t>5</a:t>
-                      </a:r>
-                    </a:p>
-                  </a:txBody>
-                  <a:tcPr/>
-                </a:tc>
-                <a:tc>
-                  <a:txBody>
-                    <a:bodyPr/>
-                    <a:lstStyle/>
-                    <a:p>
-                      <a:pPr algn="r"/>
-                      <a:r>
-                        <a:rPr sz="1400" b="0">
-                          <a:latin typeface="Calibri"/>
-                        </a:rPr>
-                        <a:t>99%</a:t>
-                      </a:r>
-                    </a:p>
-                  </a:txBody>
-                  <a:tcPr/>
-                </a:tc>
-                <a:tc>
-                  <a:txBody>
-                    <a:bodyPr/>
-                    <a:lstStyle/>
-                    <a:p>
-                      <a:pPr algn="r"/>
-                      <a:r>
-                        <a:rPr sz="1400" b="0">
-                          <a:latin typeface="Calibri"/>
-                        </a:rPr>
-                        <a:t>100%</a:t>
-                      </a:r>
-                    </a:p>
-                  </a:txBody>
-                  <a:tcPr/>
-                </a:tc>
-                <a:tc>
-                  <a:txBody>
-                    <a:bodyPr/>
-                    <a:lstStyle/>
-                    <a:p>
-                      <a:pPr algn="r"/>
-                      <a:r>
-                        <a:rPr sz="1400" b="0">
-                          <a:latin typeface="Calibri"/>
-                        </a:rPr>
-                        <a:t>100%</a:t>
-                      </a:r>
-                    </a:p>
-                  </a:txBody>
-                  <a:tcPr/>
-                </a:tc>
-              </a:tr>
-            </a:tbl>
-          </a:graphicData>
-        </a:graphic>
-      </p:graphicFrame>
-      <p:sp>
-        <p:nvSpPr>
-          <p:cNvPr id="5" name="TextBox 4"/>
-          <p:cNvSpPr txBox="1"/>
-          <p:nvPr/>
-        </p:nvSpPr>
-        <p:spPr>
-          <a:xfrm>
-            <a:off x="822960" y="4114800"/>
-            <a:ext cx="10607040" cy="4206240"/>
-          </a:xfrm>
-          <a:prstGeom prst="rect">
-            <a:avLst/>
-          </a:prstGeom>
-          <a:noFill/>
-        </p:spPr>
-        <p:txBody>
-          <a:bodyPr wrap="square">
-            <a:spAutoFit/>
-          </a:bodyPr>
-          <a:lstStyle/>
-          <a:p>
-            <a:pPr>
-              <a:spcAft>
-                <a:spcPts val="1200"/>
-              </a:spcAft>
-            </a:pPr>
-            <a:r>
-              <a:rPr sz="1500" b="1">
-                <a:solidFill>
-                  <a:srgbClr val="C1543A"/>
-                </a:solidFill>
-                <a:latin typeface="Calibri"/>
-              </a:rPr>
-              <a:t>We planned to run 25 cases at 2 repeats. That design detects a 20-point gap 8% of the time.</a:t>
-            </a:r>
-          </a:p>
-          <a:p>
-            <a:pPr>
-              <a:spcAft>
-                <a:spcPts val="1200"/>
-              </a:spcAft>
-            </a:pPr>
-            <a:r>
-              <a:rPr sz="1500" b="0">
-                <a:solidFill>
-                  <a:srgbClr val="1B1B1B"/>
-                </a:solidFill>
-                <a:latin typeface="Calibri"/>
-              </a:rPr>
-              <a:t>The published result that motivated the work, 24/25 against 19/25, is a 20-point gap. We would have missed it nine times in ten.</a:t>
-            </a:r>
-          </a:p>
-          <a:p>
-            <a:pPr>
-              <a:spcAft>
-                <a:spcPts val="1200"/>
-              </a:spcAft>
-            </a:pPr>
-            <a:r>
-              <a:rPr sz="1500" b="1">
-                <a:solidFill>
-                  <a:srgbClr val="0B6E4F"/>
-                </a:solidFill>
-                <a:latin typeface="Calibri"/>
-              </a:rPr>
-              <a:t>Simulated before spending the compute, not after.</a:t>
-            </a:r>
-          </a:p>
-        </p:txBody>
-      </p:sp>
-    </p:spTree>
-  </p:cSld>
-  <p:clrMapOvr>
-    <a:masterClrMapping/>
-  </p:clrMapOvr>
-</p:sld>
-</file>
-
-<file path=ppt/slides/slide11.xml><?xml version="1.0" encoding="utf-8"?>
-<p:sld xmlns:a="http://schemas.openxmlformats.org/drawingml/2006/main" xmlns:p="http://schemas.openxmlformats.org/presentationml/2006/main" xmlns:r="http://schemas.openxmlformats.org/officeDocument/2006/relationships">
-  <p:cSld>
-    <p:spTree>
-      <p:nvGrpSpPr>
-        <p:cNvPr id="1" name=""/>
-        <p:cNvGrpSpPr/>
-        <p:nvPr/>
-      </p:nvGrpSpPr>
-      <p:grpSpPr/>
-      <p:sp>
-        <p:nvSpPr>
-          <p:cNvPr id="2" name="TextBox 1"/>
-          <p:cNvSpPr txBox="1"/>
-          <p:nvPr/>
-        </p:nvSpPr>
-        <p:spPr>
-          <a:xfrm>
-            <a:off x="640080" y="320040"/>
-            <a:ext cx="10972800" cy="320040"/>
-          </a:xfrm>
-          <a:prstGeom prst="rect">
-            <a:avLst/>
-          </a:prstGeom>
-          <a:noFill/>
-        </p:spPr>
-        <p:txBody>
-          <a:bodyPr wrap="square">
-            <a:spAutoFit/>
-          </a:bodyPr>
-          <a:lstStyle/>
-          <a:p>
-            <a:pPr algn="l">
-              <a:spcAft>
-                <a:spcPts val="600"/>
-              </a:spcAft>
-            </a:pPr>
-            <a:r>
-              <a:rPr sz="1200" b="0">
-                <a:solidFill>
-                  <a:srgbClr val="6E6E6E"/>
-                </a:solidFill>
-                <a:latin typeface="Calibri"/>
-              </a:rPr>
-              <a:t>ATTESTATION</a:t>
-            </a:r>
-          </a:p>
-        </p:txBody>
-      </p:sp>
-      <p:sp>
-        <p:nvSpPr>
-          <p:cNvPr id="3" name="TextBox 2"/>
-          <p:cNvSpPr txBox="1"/>
-          <p:nvPr/>
-        </p:nvSpPr>
-        <p:spPr>
-          <a:xfrm>
-            <a:off x="640080" y="640080"/>
-            <a:ext cx="10972800" cy="822960"/>
-          </a:xfrm>
-          <a:prstGeom prst="rect">
-            <a:avLst/>
-          </a:prstGeom>
-          <a:noFill/>
-        </p:spPr>
-        <p:txBody>
-          <a:bodyPr wrap="square">
-            <a:spAutoFit/>
-          </a:bodyPr>
-          <a:lstStyle/>
-          <a:p>
-            <a:pPr algn="l">
-              <a:spcAft>
-                <a:spcPts val="600"/>
-              </a:spcAft>
-            </a:pPr>
-            <a:r>
-              <a:rPr sz="2800" b="1">
-                <a:solidFill>
-                  <a:srgbClr val="1B1B1B"/>
-                </a:solidFill>
-                <a:latin typeface="Calibri"/>
-              </a:rPr>
-              <a:t>Verification architecture</a:t>
-            </a:r>
-          </a:p>
-        </p:txBody>
-      </p:sp>
-      <p:sp>
-        <p:nvSpPr>
-          <p:cNvPr id="4" name="TextBox 3"/>
-          <p:cNvSpPr txBox="1"/>
-          <p:nvPr/>
-        </p:nvSpPr>
-        <p:spPr>
-          <a:xfrm>
-            <a:off x="822960" y="1737360"/>
-            <a:ext cx="10607040" cy="4206240"/>
-          </a:xfrm>
-          <a:prstGeom prst="rect">
-            <a:avLst/>
-          </a:prstGeom>
-          <a:noFill/>
-        </p:spPr>
-        <p:txBody>
-          <a:bodyPr wrap="square">
-            <a:spAutoFit/>
-          </a:bodyPr>
-          <a:lstStyle/>
-          <a:p>
-            <a:pPr>
-              <a:spcAft>
-                <a:spcPts val="1200"/>
-              </a:spcAft>
-            </a:pPr>
-            <a:r>
-              <a:rPr sz="1500" b="1">
-                <a:solidFill>
-                  <a:srgbClr val="1B1B1B"/>
-                </a:solidFill>
-                <a:latin typeface="Calibri"/>
-              </a:rPr>
-              <a:t>Signing uses SEMQ. Repo content-addresses the artifacts, notary produces an Ed25519 sidecar.</a:t>
-            </a:r>
-          </a:p>
-          <a:p>
-            <a:pPr>
-              <a:spcAft>
-                <a:spcPts val="1200"/>
-              </a:spcAft>
-            </a:pPr>
-            <a:r>
-              <a:rPr sz="1500" b="0">
-                <a:solidFill>
-                  <a:srgbClr val="1B1B1B"/>
-                </a:solidFill>
-                <a:latin typeface="Calibri"/>
-              </a:rPr>
-              <a:t>What is signed is a manifest, not the report. It names every input by digest, so swapping the data underneath an unchanged report fails.</a:t>
-            </a:r>
-          </a:p>
-          <a:p>
-            <a:pPr>
-              <a:spcAft>
-                <a:spcPts val="1200"/>
-              </a:spcAft>
-            </a:pPr>
-            <a:r>
-              <a:rPr sz="1500" b="1">
-                <a:solidFill>
-                  <a:srgbClr val="0B6E4F"/>
-                </a:solidFill>
-                <a:latin typeface="Calibri"/>
-              </a:rPr>
-              <a:t>Verification does not require SEMQ. The standalone verifier is stdlib plus cryptography, and a test walks its import graph to prove it.</a:t>
-            </a:r>
-          </a:p>
-          <a:p>
-            <a:pPr>
-              <a:spcAft>
-                <a:spcPts val="1200"/>
-              </a:spcAft>
-            </a:pPr>
-            <a:r>
-              <a:rPr sz="1500" b="0">
-                <a:solidFill>
-                  <a:srgbClr val="1B1B1B"/>
-                </a:solidFill>
-                <a:latin typeface="Calibri"/>
-              </a:rPr>
-              <a:t/>
-            </a:r>
-          </a:p>
-          <a:p>
-            <a:pPr>
-              <a:spcAft>
-                <a:spcPts val="1200"/>
-              </a:spcAft>
-            </a:pPr>
-            <a:r>
-              <a:rPr sz="1500" b="0">
-                <a:solidFill>
-                  <a:srgbClr val="6E6E6E"/>
-                </a:solidFill>
-                <a:latin typeface="Calibri"/>
-              </a:rPr>
-              <a:t>Stated limits: a pass shows what was signed, not who signed it unless you pass a key you already trust. Without a timestamp authority the recorded time is the signer's own clock.</a:t>
-            </a:r>
-          </a:p>
-        </p:txBody>
-      </p:sp>
-    </p:spTree>
-  </p:cSld>
-  <p:clrMapOvr>
-    <a:masterClrMapping/>
-  </p:clrMapOvr>
-</p:sld>
-</file>
-
-<file path=ppt/slides/slide12.xml><?xml version="1.0" encoding="utf-8"?>
-<p:sld xmlns:a="http://schemas.openxmlformats.org/drawingml/2006/main" xmlns:p="http://schemas.openxmlformats.org/presentationml/2006/main" xmlns:r="http://schemas.openxmlformats.org/officeDocument/2006/relationships">
-  <p:cSld>
-    <p:spTree>
-      <p:nvGrpSpPr>
-        <p:cNvPr id="1" name=""/>
-        <p:cNvGrpSpPr/>
-        <p:nvPr/>
-      </p:nvGrpSpPr>
-      <p:grpSpPr/>
-      <p:sp>
-        <p:nvSpPr>
-          <p:cNvPr id="2" name="TextBox 1"/>
-          <p:cNvSpPr txBox="1"/>
-          <p:nvPr/>
-        </p:nvSpPr>
-        <p:spPr>
-          <a:xfrm>
-            <a:off x="640080" y="320040"/>
-            <a:ext cx="10972800" cy="320040"/>
-          </a:xfrm>
-          <a:prstGeom prst="rect">
-            <a:avLst/>
-          </a:prstGeom>
-          <a:noFill/>
-        </p:spPr>
-        <p:txBody>
-          <a:bodyPr wrap="square">
-            <a:spAutoFit/>
-          </a:bodyPr>
-          <a:lstStyle/>
-          <a:p>
-            <a:pPr algn="l">
-              <a:spcAft>
-                <a:spcPts val="600"/>
-              </a:spcAft>
-            </a:pPr>
-            <a:r>
-              <a:rPr sz="1200" b="0">
-                <a:solidFill>
-                  <a:srgbClr val="6E6E6E"/>
-                </a:solidFill>
-                <a:latin typeface="Calibri"/>
-              </a:rPr>
-              <a:t>CREDIBILITY</a:t>
-            </a:r>
-          </a:p>
-        </p:txBody>
-      </p:sp>
-      <p:sp>
-        <p:nvSpPr>
-          <p:cNvPr id="3" name="TextBox 2"/>
-          <p:cNvSpPr txBox="1"/>
-          <p:nvPr/>
-        </p:nvSpPr>
-        <p:spPr>
-          <a:xfrm>
-            <a:off x="640080" y="640080"/>
-            <a:ext cx="10972800" cy="822960"/>
-          </a:xfrm>
-          <a:prstGeom prst="rect">
-            <a:avLst/>
-          </a:prstGeom>
-          <a:noFill/>
-        </p:spPr>
-        <p:txBody>
-          <a:bodyPr wrap="square">
-            <a:spAutoFit/>
-          </a:bodyPr>
-          <a:lstStyle/>
-          <a:p>
-            <a:pPr algn="l">
-              <a:spcAft>
-                <a:spcPts val="600"/>
-              </a:spcAft>
-            </a:pPr>
-            <a:r>
-              <a:rPr sz="2800" b="1">
-                <a:solidFill>
-                  <a:srgbClr val="1B1B1B"/>
-                </a:solidFill>
-                <a:latin typeface="Calibri"/>
-              </a:rPr>
-              <a:t>What we retracted, and why that matters</a:t>
-            </a:r>
-          </a:p>
-        </p:txBody>
-      </p:sp>
-      <p:graphicFrame>
-        <p:nvGraphicFramePr>
-          <p:cNvPr id="4" name="Table 3"/>
-          <p:cNvGraphicFramePr>
-            <a:graphicFrameLocks noGrp="1"/>
-          </p:cNvGraphicFramePr>
-          <p:nvPr/>
-        </p:nvGraphicFramePr>
-        <p:xfrm>
-          <a:off x="822960" y="1828800"/>
-          <a:ext cx="10515600" cy="3291840"/>
-        </p:xfrm>
-        <a:graphic>
-          <a:graphicData uri="http://schemas.openxmlformats.org/drawingml/2006/table">
-            <a:tbl>
-              <a:tblPr firstRow="1" bandRow="1">
-                <a:tableStyleId>{5C22544A-7EE6-4342-B048-85BDC9FD1C3A}</a:tableStyleId>
-              </a:tblPr>
-              <a:tblGrid>
-                <a:gridCol w="5257800"/>
-                <a:gridCol w="5257800"/>
-              </a:tblGrid>
-              <a:tr h="548640">
-                <a:tc>
-                  <a:txBody>
-                    <a:bodyPr/>
-                    <a:lstStyle/>
-                    <a:p>
-                      <a:pPr algn="l"/>
-                      <a:r>
-                        <a:rPr sz="1400" b="1">
-                          <a:latin typeface="Calibri"/>
-                        </a:rPr>
-                        <a:t>Claim</a:t>
-                      </a:r>
-                    </a:p>
-                  </a:txBody>
-                  <a:tcPr/>
-                </a:tc>
-                <a:tc>
-                  <a:txBody>
-                    <a:bodyPr/>
-                    <a:lstStyle/>
-                    <a:p>
-                      <a:pPr algn="r"/>
-                      <a:r>
-                        <a:rPr sz="1400" b="1">
-                          <a:latin typeface="Calibri"/>
-                        </a:rPr>
-                        <a:t>Status</a:t>
-                      </a:r>
-                    </a:p>
-                  </a:txBody>
-                  <a:tcPr/>
-                </a:tc>
-              </a:tr>
-              <a:tr h="548640">
-                <a:tc>
-                  <a:txBody>
-                    <a:bodyPr/>
-                    <a:lstStyle/>
-                    <a:p>
-                      <a:pPr algn="l"/>
-                      <a:r>
-                        <a:rPr sz="1400" b="0">
-                          <a:latin typeface="Calibri"/>
-                        </a:rPr>
-                        <a:t>'SEMQ is ~300x more sensitive than retrieval'</a:t>
-                      </a:r>
-                    </a:p>
-                  </a:txBody>
-                  <a:tcPr/>
-                </a:tc>
-                <a:tc>
-                  <a:txBody>
-                    <a:bodyPr/>
-                    <a:lstStyle/>
-                    <a:p>
-                      <a:pPr algn="r"/>
-                      <a:r>
-                        <a:rPr sz="1400" b="0">
-                          <a:latin typeface="Calibri"/>
-                        </a:rPr>
-                        <a:t>Retracted</a:t>
-                      </a:r>
-                    </a:p>
-                  </a:txBody>
-                  <a:tcPr/>
-                </a:tc>
-              </a:tr>
-              <a:tr h="548640">
-                <a:tc>
-                  <a:txBody>
-                    <a:bodyPr/>
-                    <a:lstStyle/>
-                    <a:p>
-                      <a:pPr algn="l"/>
-                      <a:r>
-                        <a:rPr sz="1400" b="0">
-                          <a:latin typeface="Calibri"/>
-                        </a:rPr>
-                        <a:t>'SEMQ is necessary for the index' (v1, seed stability)</a:t>
-                      </a:r>
-                    </a:p>
-                  </a:txBody>
-                  <a:tcPr/>
-                </a:tc>
-                <a:tc>
-                  <a:txBody>
-                    <a:bodyPr/>
-                    <a:lstStyle/>
-                    <a:p>
-                      <a:pPr algn="r"/>
-                      <a:r>
-                        <a:rPr sz="1400" b="0">
-                          <a:latin typeface="Calibri"/>
-                        </a:rPr>
-                        <a:t>Retracted</a:t>
-                      </a:r>
-                    </a:p>
-                  </a:txBody>
-                  <a:tcPr/>
-                </a:tc>
-              </a:tr>
-              <a:tr h="548640">
-                <a:tc>
-                  <a:txBody>
-                    <a:bodyPr/>
-                    <a:lstStyle/>
-                    <a:p>
-                      <a:pPr algn="l"/>
-                      <a:r>
-                        <a:rPr sz="1400" b="0">
-                          <a:latin typeface="Calibri"/>
-                        </a:rPr>
-                        <a:t>'A frozen VQ is not verifiable' (v2)</a:t>
-                      </a:r>
-                    </a:p>
-                  </a:txBody>
-                  <a:tcPr/>
-                </a:tc>
-                <a:tc>
-                  <a:txBody>
-                    <a:bodyPr/>
-                    <a:lstStyle/>
-                    <a:p>
-                      <a:pPr algn="r"/>
-                      <a:r>
-                        <a:rPr sz="1400" b="0">
-                          <a:latin typeface="Calibri"/>
-                        </a:rPr>
-                        <a:t>Retracted</a:t>
-                      </a:r>
-                    </a:p>
-                  </a:txBody>
-                  <a:tcPr/>
-                </a:tc>
-              </a:tr>
-              <a:tr h="548640">
-                <a:tc>
-                  <a:txBody>
-                    <a:bodyPr/>
-                    <a:lstStyle/>
-                    <a:p>
-                      <a:pPr algn="l"/>
-                      <a:r>
-                        <a:rPr sz="1400" b="0">
-                          <a:latin typeface="Calibri"/>
-                        </a:rPr>
-                        <a:t>'Serving changes are invisible to retrieval'</a:t>
-                      </a:r>
-                    </a:p>
-                  </a:txBody>
-                  <a:tcPr/>
-                </a:tc>
-                <a:tc>
-                  <a:txBody>
-                    <a:bodyPr/>
-                    <a:lstStyle/>
-                    <a:p>
-                      <a:pPr algn="r"/>
-                      <a:r>
-                        <a:rPr sz="1400" b="0">
-                          <a:latin typeface="Calibri"/>
-                        </a:rPr>
-                        <a:t>Narrowed to quality metrics</a:t>
-                      </a:r>
-                    </a:p>
-                  </a:txBody>
-                  <a:tcPr/>
-                </a:tc>
-              </a:tr>
-              <a:tr h="548640">
-                <a:tc>
-                  <a:txBody>
-                    <a:bodyPr/>
-                    <a:lstStyle/>
-                    <a:p>
-                      <a:pPr algn="l"/>
-                      <a:r>
-                        <a:rPr sz="1400" b="0">
-                          <a:latin typeface="Calibri"/>
-                        </a:rPr>
-                        <a:t>'SEMQ is the most sensitive decoding probe'</a:t>
-                      </a:r>
-                    </a:p>
-                  </a:txBody>
-                  <a:tcPr/>
-                </a:tc>
-                <a:tc>
-                  <a:txBody>
-                    <a:bodyPr/>
-                    <a:lstStyle/>
-                    <a:p>
-                      <a:pPr algn="r"/>
-                      <a:r>
-                        <a:rPr sz="1400" b="0">
-                          <a:latin typeface="Calibri"/>
-                        </a:rPr>
-                        <a:t>Withdrawn; margin is cheaper</a:t>
-                      </a:r>
-                    </a:p>
-                  </a:txBody>
-                  <a:tcPr/>
-                </a:tc>
-              </a:tr>
-            </a:tbl>
-          </a:graphicData>
-        </a:graphic>
-      </p:graphicFrame>
-      <p:sp>
-        <p:nvSpPr>
-          <p:cNvPr id="5" name="TextBox 4"/>
-          <p:cNvSpPr txBox="1"/>
-          <p:nvPr/>
-        </p:nvSpPr>
-        <p:spPr>
-          <a:xfrm>
-            <a:off x="822960" y="5029200"/>
-            <a:ext cx="10607040" cy="4206240"/>
-          </a:xfrm>
-          <a:prstGeom prst="rect">
-            <a:avLst/>
-          </a:prstGeom>
-          <a:noFill/>
-        </p:spPr>
-        <p:txBody>
-          <a:bodyPr wrap="square">
-            <a:spAutoFit/>
-          </a:bodyPr>
-          <a:lstStyle/>
-          <a:p>
-            <a:pPr>
-              <a:spcAft>
-                <a:spcPts val="1200"/>
-              </a:spcAft>
-            </a:pPr>
-            <a:r>
-              <a:rPr sz="1600" b="1">
-                <a:solidFill>
-                  <a:srgbClr val="0B6E4F"/>
-                </a:solidFill>
-                <a:latin typeface="Calibri"/>
-              </a:rPr>
-              <a:t>Each was retracted because we tested it adversarially and it failed, not because someone else caught it.</a:t>
-            </a:r>
-          </a:p>
-          <a:p>
-            <a:pPr>
-              <a:spcAft>
-                <a:spcPts val="1200"/>
-              </a:spcAft>
-            </a:pPr>
-            <a:r>
-              <a:rPr sz="1600" b="0">
-                <a:solidFill>
-                  <a:srgbClr val="1B1B1B"/>
-                </a:solidFill>
-                <a:latin typeface="Calibri"/>
-              </a:rPr>
-              <a:t>The claims that remain have survived that process.</a:t>
             </a:r>
           </a:p>
         </p:txBody>
@@ -5973,7 +4769,7 @@
                 </a:solidFill>
                 <a:latin typeface="Calibri"/>
               </a:rPr>
-              <a:t>METHOD</a:t>
+              <a:t>ATTESTATION</a:t>
             </a:r>
           </a:p>
         </p:txBody>
@@ -6012,7 +4808,7 @@
                 </a:solidFill>
                 <a:latin typeface="Calibri"/>
               </a:rPr>
-              <a:t>ARI-E: the estimator and its control</a:t>
+              <a:t>Verification architecture</a:t>
             </a:r>
           </a:p>
         </p:txBody>
@@ -6045,13 +4841,13 @@
               </a:spcAft>
             </a:pPr>
             <a:r>
-              <a:rPr sz="1600" b="1">
+              <a:rPr sz="1500" b="1">
                 <a:solidFill>
                   <a:srgbClr val="1B1B1B"/>
                 </a:solidFill>
                 <a:latin typeface="Calibri"/>
               </a:rPr>
-              <a:t>Cross-harness disagreement means nothing until you know how often one harness disagrees with itself.</a:t>
+              <a:t>Signing uses SEMQ. Repo content-addresses the artifacts, notary produces an Ed25519 sidecar.</a:t>
             </a:r>
           </a:p>
           <a:p>
@@ -6061,13 +4857,13 @@
               </a:spcAft>
             </a:pPr>
             <a:r>
-              <a:rPr sz="1600" b="0">
+              <a:rPr sz="1500" b="0">
                 <a:solidFill>
                   <a:srgbClr val="1B1B1B"/>
                 </a:solidFill>
                 <a:latin typeface="Calibri"/>
               </a:rPr>
-              <a:t/>
+              <a:t>What is signed is a manifest, not the report. It names every input by digest, so swapping the data underneath an unchanged report fails.</a:t>
             </a:r>
           </a:p>
           <a:p>
@@ -6077,13 +4873,13 @@
               </a:spcAft>
             </a:pPr>
             <a:r>
-              <a:rPr sz="1600" b="1">
-                <a:solidFill>
-                  <a:srgbClr val="2F5D8A"/>
+              <a:rPr sz="1500" b="1">
+                <a:solidFill>
+                  <a:srgbClr val="0B6E4F"/>
                 </a:solidFill>
                 <a:latin typeface="Calibri"/>
               </a:rPr>
-              <a:t>E(h1, h2)  =  mean self-consistency  -  cross-harness agreement</a:t>
+              <a:t>Verification does not require SEMQ. The standalone verifier is stdlib plus cryptography, and a test walks its import graph to prove it.</a:t>
             </a:r>
           </a:p>
           <a:p>
@@ -6093,7 +4889,7 @@
               </a:spcAft>
             </a:pPr>
             <a:r>
-              <a:rPr sz="1600" b="0">
+              <a:rPr sz="1500" b="0">
                 <a:solidFill>
                   <a:srgbClr val="1B1B1B"/>
                 </a:solidFill>
@@ -6109,45 +4905,13 @@
               </a:spcAft>
             </a:pPr>
             <a:r>
-              <a:rPr sz="1600" b="0">
-                <a:solidFill>
-                  <a:srgbClr val="1B1B1B"/>
+              <a:rPr sz="1500" b="0">
+                <a:solidFill>
+                  <a:srgbClr val="6E6E6E"/>
                 </a:solidFill>
                 <a:latin typeface="Calibri"/>
               </a:rPr>
-              <a:t>Zero means the harnesses are interchangeable on those cases.</a:t>
-            </a:r>
-          </a:p>
-          <a:p>
-            <a:pPr>
-              <a:spcAft>
-                <a:spcPts val="1200"/>
-              </a:spcAft>
-            </a:pPr>
-            <a:r>
-              <a:rPr sz="1600" b="0">
-                <a:solidFill>
-                  <a:srgbClr val="1B1B1B"/>
-                </a:solidFill>
-                <a:latin typeface="Calibri"/>
-              </a:rPr>
-              <a:t>If a harness has one run per case, self-consistency is unmeasurable. The code refuses to report an effect rather than assuming 1.0.</a:t>
-            </a:r>
-          </a:p>
-          <a:p>
-            <a:pPr>
-              <a:spcAft>
-                <a:spcPts val="1200"/>
-              </a:spcAft>
-            </a:pPr>
-            <a:r>
-              <a:rPr sz="1600" b="0">
-                <a:solidFill>
-                  <a:srgbClr val="1B1B1B"/>
-                </a:solidFill>
-                <a:latin typeface="Calibri"/>
-              </a:rPr>
-              <a:t>Intervals resample cases, not runs, because runs of one case are not independent.</a:t>
+              <a:t>Stated limits: a pass shows what was signed, not who signed it unless you pass a key you already trust. Without a timestamp authority the recorded time is the signer's own clock.</a:t>
             </a:r>
           </a:p>
         </p:txBody>
@@ -6204,7 +4968,7 @@
                 </a:solidFill>
                 <a:latin typeface="Calibri"/>
               </a:rPr>
-              <a:t>MEASUREMENT</a:t>
+              <a:t>CREDIBILITY</a:t>
             </a:r>
           </a:p>
         </p:txBody>
@@ -6243,7 +5007,7 @@
                 </a:solidFill>
                 <a:latin typeface="Calibri"/>
               </a:rPr>
-              <a:t>ARI-E: measured on 22,000 real agent runs</a:t>
+              <a:t>What we retracted, and why that matters</a:t>
             </a:r>
           </a:p>
         </p:txBody>
@@ -6258,7 +5022,7 @@
         </p:nvGraphicFramePr>
         <p:xfrm>
           <a:off x="822960" y="1828800"/>
-          <a:ext cx="10515600" cy="2834640"/>
+          <a:ext cx="10515600" cy="3291840"/>
         </p:xfrm>
         <a:graphic>
           <a:graphicData uri="http://schemas.openxmlformats.org/drawingml/2006/table">
@@ -6267,14 +5031,10 @@
                 <a:tableStyleId>{5C22544A-7EE6-4342-B048-85BDC9FD1C3A}</a:tableStyleId>
               </a:tblPr>
               <a:tblGrid>
-                <a:gridCol w="1752600"/>
-                <a:gridCol w="1752600"/>
-                <a:gridCol w="1752600"/>
-                <a:gridCol w="1752600"/>
-                <a:gridCol w="1752600"/>
-                <a:gridCol w="1752600"/>
+                <a:gridCol w="5257800"/>
+                <a:gridCol w="5257800"/>
               </a:tblGrid>
-              <a:tr h="566928">
+              <a:tr h="548640">
                 <a:tc>
                   <a:txBody>
                     <a:bodyPr/>
@@ -6282,10 +5042,10 @@
                     <a:p>
                       <a:pPr algn="l"/>
                       <a:r>
-                        <a:rPr sz="1200" b="1">
+                        <a:rPr sz="1400" b="1">
                           <a:latin typeface="Calibri"/>
                         </a:rPr>
-                        <a:t>Contrast</a:t>
+                        <a:t>Claim</a:t>
                       </a:r>
                     </a:p>
                   </a:txBody>
@@ -6298,10 +5058,28 @@
                     <a:p>
                       <a:pPr algn="r"/>
                       <a:r>
-                        <a:rPr sz="1200" b="1">
+                        <a:rPr sz="1400" b="1">
                           <a:latin typeface="Calibri"/>
                         </a:rPr>
-                        <a:t>Cases</a:t>
+                        <a:t>Status</a:t>
+                      </a:r>
+                    </a:p>
+                  </a:txBody>
+                  <a:tcPr/>
+                </a:tc>
+              </a:tr>
+              <a:tr h="548640">
+                <a:tc>
+                  <a:txBody>
+                    <a:bodyPr/>
+                    <a:lstStyle/>
+                    <a:p>
+                      <a:pPr algn="l"/>
+                      <a:r>
+                        <a:rPr sz="1400" b="0">
+                          <a:latin typeface="Calibri"/>
+                        </a:rPr>
+                        <a:t>'SEMQ is ~300x more sensitive than retrieval'</a:t>
                       </a:r>
                     </a:p>
                   </a:txBody>
@@ -6314,10 +5092,28 @@
                     <a:p>
                       <a:pPr algn="r"/>
                       <a:r>
-                        <a:rPr sz="1200" b="1">
+                        <a:rPr sz="1400" b="0">
                           <a:latin typeface="Calibri"/>
                         </a:rPr>
-                        <a:t>Self</a:t>
+                        <a:t>Retracted</a:t>
+                      </a:r>
+                    </a:p>
+                  </a:txBody>
+                  <a:tcPr/>
+                </a:tc>
+              </a:tr>
+              <a:tr h="548640">
+                <a:tc>
+                  <a:txBody>
+                    <a:bodyPr/>
+                    <a:lstStyle/>
+                    <a:p>
+                      <a:pPr algn="l"/>
+                      <a:r>
+                        <a:rPr sz="1400" b="0">
+                          <a:latin typeface="Calibri"/>
+                        </a:rPr>
+                        <a:t>'SEMQ is necessary for the index' (v1, seed stability)</a:t>
                       </a:r>
                     </a:p>
                   </a:txBody>
@@ -6330,10 +5126,28 @@
                     <a:p>
                       <a:pPr algn="r"/>
                       <a:r>
-                        <a:rPr sz="1200" b="1">
+                        <a:rPr sz="1400" b="0">
                           <a:latin typeface="Calibri"/>
                         </a:rPr>
-                        <a:t>Cross</a:t>
+                        <a:t>Retracted</a:t>
+                      </a:r>
+                    </a:p>
+                  </a:txBody>
+                  <a:tcPr/>
+                </a:tc>
+              </a:tr>
+              <a:tr h="548640">
+                <a:tc>
+                  <a:txBody>
+                    <a:bodyPr/>
+                    <a:lstStyle/>
+                    <a:p>
+                      <a:pPr algn="l"/>
+                      <a:r>
+                        <a:rPr sz="1400" b="0">
+                          <a:latin typeface="Calibri"/>
+                        </a:rPr>
+                        <a:t>'A frozen VQ is not verifiable' (v2)</a:t>
                       </a:r>
                     </a:p>
                   </a:txBody>
@@ -6346,10 +5160,28 @@
                     <a:p>
                       <a:pPr algn="r"/>
                       <a:r>
-                        <a:rPr sz="1200" b="1">
+                        <a:rPr sz="1400" b="0">
                           <a:latin typeface="Calibri"/>
                         </a:rPr>
-                        <a:t>Effect</a:t>
+                        <a:t>Retracted</a:t>
+                      </a:r>
+                    </a:p>
+                  </a:txBody>
+                  <a:tcPr/>
+                </a:tc>
+              </a:tr>
+              <a:tr h="548640">
+                <a:tc>
+                  <a:txBody>
+                    <a:bodyPr/>
+                    <a:lstStyle/>
+                    <a:p>
+                      <a:pPr algn="l"/>
+                      <a:r>
+                        <a:rPr sz="1400" b="0">
+                          <a:latin typeface="Calibri"/>
+                        </a:rPr>
+                        <a:t>'Serving changes are invisible to retrieval'</a:t>
                       </a:r>
                     </a:p>
                   </a:txBody>
@@ -6362,17 +5194,17 @@
                     <a:p>
                       <a:pPr algn="r"/>
                       <a:r>
-                        <a:rPr sz="1200" b="1">
+                        <a:rPr sz="1400" b="0">
                           <a:latin typeface="Calibri"/>
                         </a:rPr>
-                        <a:t>95% CI</a:t>
+                        <a:t>Narrowed to quality metrics</a:t>
                       </a:r>
                     </a:p>
                   </a:txBody>
                   <a:tcPr/>
                 </a:tc>
               </a:tr>
-              <a:tr h="566928">
+              <a:tr h="548640">
                 <a:tc>
                   <a:txBody>
                     <a:bodyPr/>
@@ -6380,10 +5212,10 @@
                     <a:p>
                       <a:pPr algn="l"/>
                       <a:r>
-                        <a:rPr sz="1200" b="0">
+                        <a:rPr sz="1400" b="0">
                           <a:latin typeface="Calibri"/>
                         </a:rPr>
-                        <a:t>scaffold model=qwen35_122b</a:t>
+                        <a:t>'SEMQ is the most sensitive decoding probe'</a:t>
                       </a:r>
                     </a:p>
                   </a:txBody>
@@ -6396,368 +5228,10 @@
                     <a:p>
                       <a:pPr algn="r"/>
                       <a:r>
-                        <a:rPr sz="1200" b="0">
+                        <a:rPr sz="1400" b="0">
                           <a:latin typeface="Calibri"/>
                         </a:rPr>
-                        <a:t>10,788</a:t>
-                      </a:r>
-                    </a:p>
-                  </a:txBody>
-                  <a:tcPr/>
-                </a:tc>
-                <a:tc>
-                  <a:txBody>
-                    <a:bodyPr/>
-                    <a:lstStyle/>
-                    <a:p>
-                      <a:pPr algn="r"/>
-                      <a:r>
-                        <a:rPr sz="1200" b="0">
-                          <a:latin typeface="Calibri"/>
-                        </a:rPr>
-                        <a:t>0.874</a:t>
-                      </a:r>
-                    </a:p>
-                  </a:txBody>
-                  <a:tcPr/>
-                </a:tc>
-                <a:tc>
-                  <a:txBody>
-                    <a:bodyPr/>
-                    <a:lstStyle/>
-                    <a:p>
-                      <a:pPr algn="r"/>
-                      <a:r>
-                        <a:rPr sz="1200" b="0">
-                          <a:latin typeface="Calibri"/>
-                        </a:rPr>
-                        <a:t>0.785</a:t>
-                      </a:r>
-                    </a:p>
-                  </a:txBody>
-                  <a:tcPr/>
-                </a:tc>
-                <a:tc>
-                  <a:txBody>
-                    <a:bodyPr/>
-                    <a:lstStyle/>
-                    <a:p>
-                      <a:pPr algn="r"/>
-                      <a:r>
-                        <a:rPr sz="1200" b="0">
-                          <a:latin typeface="Calibri"/>
-                        </a:rPr>
-                        <a:t>+0.089</a:t>
-                      </a:r>
-                    </a:p>
-                  </a:txBody>
-                  <a:tcPr/>
-                </a:tc>
-                <a:tc>
-                  <a:txBody>
-                    <a:bodyPr/>
-                    <a:lstStyle/>
-                    <a:p>
-                      <a:pPr algn="r"/>
-                      <a:r>
-                        <a:rPr sz="1200" b="0">
-                          <a:latin typeface="Calibri"/>
-                        </a:rPr>
-                        <a:t>[+0.083, +0.094]</a:t>
-                      </a:r>
-                    </a:p>
-                  </a:txBody>
-                  <a:tcPr/>
-                </a:tc>
-              </a:tr>
-              <a:tr h="566928">
-                <a:tc>
-                  <a:txBody>
-                    <a:bodyPr/>
-                    <a:lstStyle/>
-                    <a:p>
-                      <a:pPr algn="l"/>
-                      <a:r>
-                        <a:rPr sz="1200" b="0">
-                          <a:latin typeface="Calibri"/>
-                        </a:rPr>
-                        <a:t>scaffold model=minimax_m25</a:t>
-                      </a:r>
-                    </a:p>
-                  </a:txBody>
-                  <a:tcPr/>
-                </a:tc>
-                <a:tc>
-                  <a:txBody>
-                    <a:bodyPr/>
-                    <a:lstStyle/>
-                    <a:p>
-                      <a:pPr algn="r"/>
-                      <a:r>
-                        <a:rPr sz="1200" b="0">
-                          <a:latin typeface="Calibri"/>
-                        </a:rPr>
-                        <a:t>12,195</a:t>
-                      </a:r>
-                    </a:p>
-                  </a:txBody>
-                  <a:tcPr/>
-                </a:tc>
-                <a:tc>
-                  <a:txBody>
-                    <a:bodyPr/>
-                    <a:lstStyle/>
-                    <a:p>
-                      <a:pPr algn="r"/>
-                      <a:r>
-                        <a:rPr sz="1200" b="0">
-                          <a:latin typeface="Calibri"/>
-                        </a:rPr>
-                        <a:t>0.899</a:t>
-                      </a:r>
-                    </a:p>
-                  </a:txBody>
-                  <a:tcPr/>
-                </a:tc>
-                <a:tc>
-                  <a:txBody>
-                    <a:bodyPr/>
-                    <a:lstStyle/>
-                    <a:p>
-                      <a:pPr algn="r"/>
-                      <a:r>
-                        <a:rPr sz="1200" b="0">
-                          <a:latin typeface="Calibri"/>
-                        </a:rPr>
-                        <a:t>0.849</a:t>
-                      </a:r>
-                    </a:p>
-                  </a:txBody>
-                  <a:tcPr/>
-                </a:tc>
-                <a:tc>
-                  <a:txBody>
-                    <a:bodyPr/>
-                    <a:lstStyle/>
-                    <a:p>
-                      <a:pPr algn="r"/>
-                      <a:r>
-                        <a:rPr sz="1200" b="0">
-                          <a:latin typeface="Calibri"/>
-                        </a:rPr>
-                        <a:t>+0.050</a:t>
-                      </a:r>
-                    </a:p>
-                  </a:txBody>
-                  <a:tcPr/>
-                </a:tc>
-                <a:tc>
-                  <a:txBody>
-                    <a:bodyPr/>
-                    <a:lstStyle/>
-                    <a:p>
-                      <a:pPr algn="r"/>
-                      <a:r>
-                        <a:rPr sz="1200" b="0">
-                          <a:latin typeface="Calibri"/>
-                        </a:rPr>
-                        <a:t>[+0.044, +0.052]</a:t>
-                      </a:r>
-                    </a:p>
-                  </a:txBody>
-                  <a:tcPr/>
-                </a:tc>
-              </a:tr>
-              <a:tr h="566928">
-                <a:tc>
-                  <a:txBody>
-                    <a:bodyPr/>
-                    <a:lstStyle/>
-                    <a:p>
-                      <a:pPr algn="l"/>
-                      <a:r>
-                        <a:rPr sz="1200" b="0">
-                          <a:latin typeface="Calibri"/>
-                        </a:rPr>
-                        <a:t>model, scaffold=sweagent</a:t>
-                      </a:r>
-                    </a:p>
-                  </a:txBody>
-                  <a:tcPr/>
-                </a:tc>
-                <a:tc>
-                  <a:txBody>
-                    <a:bodyPr/>
-                    <a:lstStyle/>
-                    <a:p>
-                      <a:pPr algn="r"/>
-                      <a:r>
-                        <a:rPr sz="1200" b="0">
-                          <a:latin typeface="Calibri"/>
-                        </a:rPr>
-                        <a:t>10,674</a:t>
-                      </a:r>
-                    </a:p>
-                  </a:txBody>
-                  <a:tcPr/>
-                </a:tc>
-                <a:tc>
-                  <a:txBody>
-                    <a:bodyPr/>
-                    <a:lstStyle/>
-                    <a:p>
-                      <a:pPr algn="r"/>
-                      <a:r>
-                        <a:rPr sz="1200" b="0">
-                          <a:latin typeface="Calibri"/>
-                        </a:rPr>
-                        <a:t>0.880</a:t>
-                      </a:r>
-                    </a:p>
-                  </a:txBody>
-                  <a:tcPr/>
-                </a:tc>
-                <a:tc>
-                  <a:txBody>
-                    <a:bodyPr/>
-                    <a:lstStyle/>
-                    <a:p>
-                      <a:pPr algn="r"/>
-                      <a:r>
-                        <a:rPr sz="1200" b="0">
-                          <a:latin typeface="Calibri"/>
-                        </a:rPr>
-                        <a:t>0.839</a:t>
-                      </a:r>
-                    </a:p>
-                  </a:txBody>
-                  <a:tcPr/>
-                </a:tc>
-                <a:tc>
-                  <a:txBody>
-                    <a:bodyPr/>
-                    <a:lstStyle/>
-                    <a:p>
-                      <a:pPr algn="r"/>
-                      <a:r>
-                        <a:rPr sz="1200" b="0">
-                          <a:latin typeface="Calibri"/>
-                        </a:rPr>
-                        <a:t>+0.041</a:t>
-                      </a:r>
-                    </a:p>
-                  </a:txBody>
-                  <a:tcPr/>
-                </a:tc>
-                <a:tc>
-                  <a:txBody>
-                    <a:bodyPr/>
-                    <a:lstStyle/>
-                    <a:p>
-                      <a:pPr algn="r"/>
-                      <a:r>
-                        <a:rPr sz="1200" b="0">
-                          <a:latin typeface="Calibri"/>
-                        </a:rPr>
-                        <a:t>[+0.039, +0.046]</a:t>
-                      </a:r>
-                    </a:p>
-                  </a:txBody>
-                  <a:tcPr/>
-                </a:tc>
-              </a:tr>
-              <a:tr h="566928">
-                <a:tc>
-                  <a:txBody>
-                    <a:bodyPr/>
-                    <a:lstStyle/>
-                    <a:p>
-                      <a:pPr algn="l"/>
-                      <a:r>
-                        <a:rPr sz="1200" b="0">
-                          <a:latin typeface="Calibri"/>
-                        </a:rPr>
-                        <a:t>model, scaffold=openhands</a:t>
-                      </a:r>
-                    </a:p>
-                  </a:txBody>
-                  <a:tcPr/>
-                </a:tc>
-                <a:tc>
-                  <a:txBody>
-                    <a:bodyPr/>
-                    <a:lstStyle/>
-                    <a:p>
-                      <a:pPr algn="r"/>
-                      <a:r>
-                        <a:rPr sz="1200" b="0">
-                          <a:latin typeface="Calibri"/>
-                        </a:rPr>
-                        <a:t>11,933</a:t>
-                      </a:r>
-                    </a:p>
-                  </a:txBody>
-                  <a:tcPr/>
-                </a:tc>
-                <a:tc>
-                  <a:txBody>
-                    <a:bodyPr/>
-                    <a:lstStyle/>
-                    <a:p>
-                      <a:pPr algn="r"/>
-                      <a:r>
-                        <a:rPr sz="1200" b="0">
-                          <a:latin typeface="Calibri"/>
-                        </a:rPr>
-                        <a:t>0.892</a:t>
-                      </a:r>
-                    </a:p>
-                  </a:txBody>
-                  <a:tcPr/>
-                </a:tc>
-                <a:tc>
-                  <a:txBody>
-                    <a:bodyPr/>
-                    <a:lstStyle/>
-                    <a:p>
-                      <a:pPr algn="r"/>
-                      <a:r>
-                        <a:rPr sz="1200" b="0">
-                          <a:latin typeface="Calibri"/>
-                        </a:rPr>
-                        <a:t>0.833</a:t>
-                      </a:r>
-                    </a:p>
-                  </a:txBody>
-                  <a:tcPr/>
-                </a:tc>
-                <a:tc>
-                  <a:txBody>
-                    <a:bodyPr/>
-                    <a:lstStyle/>
-                    <a:p>
-                      <a:pPr algn="r"/>
-                      <a:r>
-                        <a:rPr sz="1200" b="0">
-                          <a:latin typeface="Calibri"/>
-                        </a:rPr>
-                        <a:t>+0.059</a:t>
-                      </a:r>
-                    </a:p>
-                  </a:txBody>
-                  <a:tcPr/>
-                </a:tc>
-                <a:tc>
-                  <a:txBody>
-                    <a:bodyPr/>
-                    <a:lstStyle/>
-                    <a:p>
-                      <a:pPr algn="r"/>
-                      <a:r>
-                        <a:rPr sz="1200" b="0">
-                          <a:latin typeface="Calibri"/>
-                        </a:rPr>
-                        <a:t>[+0.054, +0.062]</a:t>
+                        <a:t>Withdrawn; margin is cheaper</a:t>
                       </a:r>
                     </a:p>
                   </a:txBody>
@@ -6776,7 +5250,7 @@
         </p:nvSpPr>
         <p:spPr>
           <a:xfrm>
-            <a:off x="822960" y="4480560"/>
+            <a:off x="822960" y="5029200"/>
             <a:ext cx="10607040" cy="4206240"/>
           </a:xfrm>
           <a:prstGeom prst="rect">
@@ -6796,13 +5270,13 @@
               </a:spcAft>
             </a:pPr>
             <a:r>
-              <a:rPr sz="1400" b="0">
-                <a:solidFill>
-                  <a:srgbClr val="1B1B1B"/>
+              <a:rPr sz="1600" b="1">
+                <a:solidFill>
+                  <a:srgbClr val="0B6E4F"/>
                 </a:solidFill>
                 <a:latin typeface="Calibri"/>
               </a:rPr>
-              <a:t>Source: nvidia/Open-SWE-Traces. SWE-agent and OpenHands, crossed with two models. Neither scaffold was built by us.</a:t>
+              <a:t>Each was retracted because we tested it adversarially and it failed, not because someone else caught it.</a:t>
             </a:r>
           </a:p>
           <a:p>
@@ -6812,29 +5286,13 @@
               </a:spcAft>
             </a:pPr>
             <a:r>
-              <a:rPr sz="1400" b="0">
+              <a:rPr sz="1600" b="0">
                 <a:solidFill>
                   <a:srgbClr val="1B1B1B"/>
                 </a:solidFill>
                 <a:latin typeface="Calibri"/>
               </a:rPr>
-              <a:t>Outcome is the repository's own test suite, which the agent never saw.</a:t>
-            </a:r>
-          </a:p>
-          <a:p>
-            <a:pPr>
-              <a:spcAft>
-                <a:spcPts val="1200"/>
-              </a:spcAft>
-            </a:pPr>
-            <a:r>
-              <a:rPr sz="1400" b="1">
-                <a:solidFill>
-                  <a:srgbClr val="C1543A"/>
-                </a:solidFill>
-                <a:latin typeface="Calibri"/>
-              </a:rPr>
-              <a:t>Largest threat: 22% of rows were ungraded and dropped. If grading failure tracks difficulty, the surviving set is easier.</a:t>
+              <a:t>The claims that remain have survived that process.</a:t>
             </a:r>
           </a:p>
         </p:txBody>
